--- a/presentation.pptx
+++ b/presentation.pptx
@@ -5,32 +5,31 @@
     <p:sldMasterId id="2147483648" r:id="rId1"/>
   </p:sldMasterIdLst>
   <p:notesMasterIdLst>
-    <p:notesMasterId r:id="rId25"/>
+    <p:notesMasterId r:id="rId24"/>
   </p:notesMasterIdLst>
   <p:sldIdLst>
     <p:sldId id="256" r:id="rId2"/>
-    <p:sldId id="309" r:id="rId3"/>
-    <p:sldId id="291" r:id="rId4"/>
-    <p:sldId id="293" r:id="rId5"/>
-    <p:sldId id="294" r:id="rId6"/>
-    <p:sldId id="296" r:id="rId7"/>
-    <p:sldId id="299" r:id="rId8"/>
-    <p:sldId id="281" r:id="rId9"/>
-    <p:sldId id="304" r:id="rId10"/>
-    <p:sldId id="295" r:id="rId11"/>
-    <p:sldId id="289" r:id="rId12"/>
-    <p:sldId id="261" r:id="rId13"/>
-    <p:sldId id="305" r:id="rId14"/>
-    <p:sldId id="303" r:id="rId15"/>
-    <p:sldId id="306" r:id="rId16"/>
-    <p:sldId id="307" r:id="rId17"/>
-    <p:sldId id="308" r:id="rId18"/>
-    <p:sldId id="302" r:id="rId19"/>
-    <p:sldId id="276" r:id="rId20"/>
-    <p:sldId id="260" r:id="rId21"/>
-    <p:sldId id="267" r:id="rId22"/>
-    <p:sldId id="268" r:id="rId23"/>
-    <p:sldId id="264" r:id="rId24"/>
+    <p:sldId id="291" r:id="rId3"/>
+    <p:sldId id="293" r:id="rId4"/>
+    <p:sldId id="294" r:id="rId5"/>
+    <p:sldId id="299" r:id="rId6"/>
+    <p:sldId id="281" r:id="rId7"/>
+    <p:sldId id="304" r:id="rId8"/>
+    <p:sldId id="295" r:id="rId9"/>
+    <p:sldId id="289" r:id="rId10"/>
+    <p:sldId id="261" r:id="rId11"/>
+    <p:sldId id="305" r:id="rId12"/>
+    <p:sldId id="303" r:id="rId13"/>
+    <p:sldId id="306" r:id="rId14"/>
+    <p:sldId id="307" r:id="rId15"/>
+    <p:sldId id="308" r:id="rId16"/>
+    <p:sldId id="302" r:id="rId17"/>
+    <p:sldId id="296" r:id="rId18"/>
+    <p:sldId id="276" r:id="rId19"/>
+    <p:sldId id="260" r:id="rId20"/>
+    <p:sldId id="267" r:id="rId21"/>
+    <p:sldId id="268" r:id="rId22"/>
+    <p:sldId id="264" r:id="rId23"/>
   </p:sldIdLst>
   <p:sldSz cx="12192000" cy="6858000"/>
   <p:notesSz cx="6858000" cy="9144000"/>
@@ -219,7 +218,7 @@
           <a:p>
             <a:fld id="{ACDEDBDA-9FCC-480D-972B-BA1E1F52B951}" type="datetimeFigureOut">
               <a:rPr lang="en-GB" smtClean="0"/>
-              <a:t>26/06/2023</a:t>
+              <a:t>27/06/2023</a:t>
             </a:fld>
             <a:endParaRPr lang="en-GB"/>
           </a:p>
@@ -552,7 +551,7 @@
           <a:p>
             <a:fld id="{222FDC67-B0EA-4092-A771-27F2B839D1F7}" type="slidenum">
               <a:rPr lang="en-GB" smtClean="0"/>
-              <a:t>3</a:t>
+              <a:t>2</a:t>
             </a:fld>
             <a:endParaRPr lang="en-GB"/>
           </a:p>
@@ -737,7 +736,7 @@
           <a:p>
             <a:fld id="{D178E59D-10A7-40D8-B34F-C962BC77892D}" type="slidenum">
               <a:rPr lang="en-GB" smtClean="0"/>
-              <a:t>8</a:t>
+              <a:t>6</a:t>
             </a:fld>
             <a:endParaRPr lang="en-GB" dirty="0"/>
           </a:p>
@@ -905,7 +904,7 @@
           <a:p>
             <a:fld id="{AF2253EC-2B96-46F7-A76F-FC176A980E50}" type="datetimeFigureOut">
               <a:rPr lang="en-GB" smtClean="0"/>
-              <a:t>26/06/2023</a:t>
+              <a:t>27/06/2023</a:t>
             </a:fld>
             <a:endParaRPr lang="en-GB"/>
           </a:p>
@@ -1105,7 +1104,7 @@
           <a:p>
             <a:fld id="{AF2253EC-2B96-46F7-A76F-FC176A980E50}" type="datetimeFigureOut">
               <a:rPr lang="en-GB" smtClean="0"/>
-              <a:t>26/06/2023</a:t>
+              <a:t>27/06/2023</a:t>
             </a:fld>
             <a:endParaRPr lang="en-GB"/>
           </a:p>
@@ -1315,7 +1314,7 @@
           <a:p>
             <a:fld id="{AF2253EC-2B96-46F7-A76F-FC176A980E50}" type="datetimeFigureOut">
               <a:rPr lang="en-GB" smtClean="0"/>
-              <a:t>26/06/2023</a:t>
+              <a:t>27/06/2023</a:t>
             </a:fld>
             <a:endParaRPr lang="en-GB"/>
           </a:p>
@@ -1515,7 +1514,7 @@
           <a:p>
             <a:fld id="{AF2253EC-2B96-46F7-A76F-FC176A980E50}" type="datetimeFigureOut">
               <a:rPr lang="en-GB" smtClean="0"/>
-              <a:t>26/06/2023</a:t>
+              <a:t>27/06/2023</a:t>
             </a:fld>
             <a:endParaRPr lang="en-GB"/>
           </a:p>
@@ -1791,7 +1790,7 @@
           <a:p>
             <a:fld id="{AF2253EC-2B96-46F7-A76F-FC176A980E50}" type="datetimeFigureOut">
               <a:rPr lang="en-GB" smtClean="0"/>
-              <a:t>26/06/2023</a:t>
+              <a:t>27/06/2023</a:t>
             </a:fld>
             <a:endParaRPr lang="en-GB"/>
           </a:p>
@@ -2059,7 +2058,7 @@
           <a:p>
             <a:fld id="{AF2253EC-2B96-46F7-A76F-FC176A980E50}" type="datetimeFigureOut">
               <a:rPr lang="en-GB" smtClean="0"/>
-              <a:t>26/06/2023</a:t>
+              <a:t>27/06/2023</a:t>
             </a:fld>
             <a:endParaRPr lang="en-GB"/>
           </a:p>
@@ -2474,7 +2473,7 @@
           <a:p>
             <a:fld id="{AF2253EC-2B96-46F7-A76F-FC176A980E50}" type="datetimeFigureOut">
               <a:rPr lang="en-GB" smtClean="0"/>
-              <a:t>26/06/2023</a:t>
+              <a:t>27/06/2023</a:t>
             </a:fld>
             <a:endParaRPr lang="en-GB"/>
           </a:p>
@@ -2616,7 +2615,7 @@
           <a:p>
             <a:fld id="{AF2253EC-2B96-46F7-A76F-FC176A980E50}" type="datetimeFigureOut">
               <a:rPr lang="en-GB" smtClean="0"/>
-              <a:t>26/06/2023</a:t>
+              <a:t>27/06/2023</a:t>
             </a:fld>
             <a:endParaRPr lang="en-GB"/>
           </a:p>
@@ -2729,7 +2728,7 @@
           <a:p>
             <a:fld id="{AF2253EC-2B96-46F7-A76F-FC176A980E50}" type="datetimeFigureOut">
               <a:rPr lang="en-GB" smtClean="0"/>
-              <a:t>26/06/2023</a:t>
+              <a:t>27/06/2023</a:t>
             </a:fld>
             <a:endParaRPr lang="en-GB"/>
           </a:p>
@@ -3042,7 +3041,7 @@
           <a:p>
             <a:fld id="{AF2253EC-2B96-46F7-A76F-FC176A980E50}" type="datetimeFigureOut">
               <a:rPr lang="en-GB" smtClean="0"/>
-              <a:t>26/06/2023</a:t>
+              <a:t>27/06/2023</a:t>
             </a:fld>
             <a:endParaRPr lang="en-GB"/>
           </a:p>
@@ -3331,7 +3330,7 @@
           <a:p>
             <a:fld id="{AF2253EC-2B96-46F7-A76F-FC176A980E50}" type="datetimeFigureOut">
               <a:rPr lang="en-GB" smtClean="0"/>
-              <a:t>26/06/2023</a:t>
+              <a:t>27/06/2023</a:t>
             </a:fld>
             <a:endParaRPr lang="en-GB"/>
           </a:p>
@@ -3574,7 +3573,7 @@
           <a:p>
             <a:fld id="{AF2253EC-2B96-46F7-A76F-FC176A980E50}" type="datetimeFigureOut">
               <a:rPr lang="en-GB" smtClean="0"/>
-              <a:t>26/06/2023</a:t>
+              <a:t>27/06/2023</a:t>
             </a:fld>
             <a:endParaRPr lang="en-GB"/>
           </a:p>
@@ -4237,544 +4236,6 @@
           <p:cNvPr id="2" name="Title 1">
             <a:extLst>
               <a:ext uri="{FF2B5EF4-FFF2-40B4-BE49-F238E27FC236}">
-                <a16:creationId xmlns:a16="http://schemas.microsoft.com/office/drawing/2014/main" id="{77088832-5AAA-A193-241F-1D19961A5ECA}"/>
-              </a:ext>
-            </a:extLst>
-          </p:cNvPr>
-          <p:cNvSpPr>
-            <a:spLocks noGrp="1"/>
-          </p:cNvSpPr>
-          <p:nvPr>
-            <p:ph type="title"/>
-          </p:nvPr>
-        </p:nvSpPr>
-        <p:spPr>
-          <a:xfrm>
-            <a:off x="1048407" y="136635"/>
-            <a:ext cx="10515600" cy="1325563"/>
-          </a:xfrm>
-        </p:spPr>
-        <p:txBody>
-          <a:bodyPr>
-            <a:normAutofit/>
-          </a:bodyPr>
-          <a:lstStyle/>
-          <a:p>
-            <a:r>
-              <a:rPr lang="en-US" dirty="0"/>
-              <a:t>How do survey-based ABMs look like? </a:t>
-            </a:r>
-          </a:p>
-        </p:txBody>
-      </p:sp>
-      <p:sp>
-        <p:nvSpPr>
-          <p:cNvPr id="3" name="Content Placeholder 2">
-            <a:extLst>
-              <a:ext uri="{FF2B5EF4-FFF2-40B4-BE49-F238E27FC236}">
-                <a16:creationId xmlns:a16="http://schemas.microsoft.com/office/drawing/2014/main" id="{D0372C99-E674-8EE2-B417-2A65DAEBB0BF}"/>
-              </a:ext>
-            </a:extLst>
-          </p:cNvPr>
-          <p:cNvSpPr>
-            <a:spLocks noGrp="1"/>
-          </p:cNvSpPr>
-          <p:nvPr>
-            <p:ph idx="1"/>
-          </p:nvPr>
-        </p:nvSpPr>
-        <p:spPr>
-          <a:xfrm>
-            <a:off x="0" y="2016732"/>
-            <a:ext cx="4420192" cy="4257944"/>
-          </a:xfrm>
-        </p:spPr>
-        <p:txBody>
-          <a:bodyPr>
-            <a:normAutofit/>
-          </a:bodyPr>
-          <a:lstStyle/>
-          <a:p>
-            <a:pPr lvl="1"/>
-            <a:r>
-              <a:rPr lang="en-GB" sz="1800" dirty="0"/>
-              <a:t>Statistical model defines rules of </a:t>
-            </a:r>
-            <a:r>
-              <a:rPr lang="en-GB" sz="1800" dirty="0" err="1"/>
-              <a:t>behavior</a:t>
-            </a:r>
-            <a:r>
-              <a:rPr lang="en-GB" sz="1800" dirty="0"/>
-              <a:t>. We use ABM to reproduce individual life histories over time, letting agents shift status according to the fitted parameters (Carrasco, Mak, and </a:t>
-            </a:r>
-            <a:r>
-              <a:rPr lang="en-GB" sz="1800" dirty="0" err="1"/>
-              <a:t>Hinsch</a:t>
-            </a:r>
-            <a:r>
-              <a:rPr lang="en-GB" sz="1800" dirty="0"/>
-              <a:t>, 2023).</a:t>
-            </a:r>
-            <a:endParaRPr lang="en-US" sz="1800" dirty="0"/>
-          </a:p>
-          <a:p>
-            <a:pPr lvl="1"/>
-            <a:endParaRPr lang="en-US" sz="1800" dirty="0"/>
-          </a:p>
-          <a:p>
-            <a:pPr lvl="1"/>
-            <a:r>
-              <a:rPr lang="en-US" sz="1800" dirty="0"/>
-              <a:t>Why would we be interested?</a:t>
-            </a:r>
-          </a:p>
-          <a:p>
-            <a:pPr lvl="2"/>
-            <a:r>
-              <a:rPr lang="en-US" sz="1600" dirty="0"/>
-              <a:t>Alternative scenarios: different effect of parameters.</a:t>
-            </a:r>
-          </a:p>
-          <a:p>
-            <a:pPr lvl="2"/>
-            <a:r>
-              <a:rPr lang="en-US" sz="1600" dirty="0"/>
-              <a:t>Add theoretical features, explicit modelling of agents’ properties.</a:t>
-            </a:r>
-          </a:p>
-          <a:p>
-            <a:pPr lvl="2"/>
-            <a:r>
-              <a:rPr lang="en-US" sz="1600" dirty="0"/>
-              <a:t>Forecasting based on dynamics given by previous behavior. </a:t>
-            </a:r>
-          </a:p>
-        </p:txBody>
-      </p:sp>
-      <p:pic>
-        <p:nvPicPr>
-          <p:cNvPr id="4" name="Content Placeholder 4" descr="A picture containing text, diagram, line, plot&#10;&#10;Description automatically generated">
-            <a:extLst>
-              <a:ext uri="{FF2B5EF4-FFF2-40B4-BE49-F238E27FC236}">
-                <a16:creationId xmlns:a16="http://schemas.microsoft.com/office/drawing/2014/main" id="{F951678A-6877-2243-177A-26640BF7F306}"/>
-              </a:ext>
-            </a:extLst>
-          </p:cNvPr>
-          <p:cNvPicPr>
-            <a:picLocks noChangeAspect="1"/>
-          </p:cNvPicPr>
-          <p:nvPr/>
-        </p:nvPicPr>
-        <p:blipFill>
-          <a:blip r:embed="rId2">
-            <a:extLst>
-              <a:ext uri="{28A0092B-C50C-407E-A947-70E740481C1C}">
-                <a14:useLocalDpi xmlns:a14="http://schemas.microsoft.com/office/drawing/2010/main" val="0"/>
-              </a:ext>
-            </a:extLst>
-          </a:blip>
-          <a:stretch>
-            <a:fillRect/>
-          </a:stretch>
-        </p:blipFill>
-        <p:spPr>
-          <a:xfrm>
-            <a:off x="4640909" y="2132347"/>
-            <a:ext cx="7551091" cy="3624626"/>
-          </a:xfrm>
-          <a:prstGeom prst="rect">
-            <a:avLst/>
-          </a:prstGeom>
-        </p:spPr>
-      </p:pic>
-    </p:spTree>
-    <p:extLst>
-      <p:ext uri="{BB962C8B-B14F-4D97-AF65-F5344CB8AC3E}">
-        <p14:creationId xmlns:p14="http://schemas.microsoft.com/office/powerpoint/2010/main" val="3978684300"/>
-      </p:ext>
-    </p:extLst>
-  </p:cSld>
-  <p:clrMapOvr>
-    <a:masterClrMapping/>
-  </p:clrMapOvr>
-</p:sld>
-</file>
-
-<file path=ppt/slides/slide11.xml><?xml version="1.0" encoding="utf-8"?>
-<p:sld xmlns:a="http://schemas.openxmlformats.org/drawingml/2006/main" xmlns:r="http://schemas.openxmlformats.org/officeDocument/2006/relationships" xmlns:p="http://schemas.openxmlformats.org/presentationml/2006/main">
-  <p:cSld>
-    <p:spTree>
-      <p:nvGrpSpPr>
-        <p:cNvPr id="1" name=""/>
-        <p:cNvGrpSpPr/>
-        <p:nvPr/>
-      </p:nvGrpSpPr>
-      <p:grpSpPr>
-        <a:xfrm>
-          <a:off x="0" y="0"/>
-          <a:ext cx="0" cy="0"/>
-          <a:chOff x="0" y="0"/>
-          <a:chExt cx="0" cy="0"/>
-        </a:xfrm>
-      </p:grpSpPr>
-      <p:sp>
-        <p:nvSpPr>
-          <p:cNvPr id="2" name="Title 1">
-            <a:extLst>
-              <a:ext uri="{FF2B5EF4-FFF2-40B4-BE49-F238E27FC236}">
-                <a16:creationId xmlns:a16="http://schemas.microsoft.com/office/drawing/2014/main" id="{0677AF2A-1E92-4745-8A44-907398137C2A}"/>
-              </a:ext>
-            </a:extLst>
-          </p:cNvPr>
-          <p:cNvSpPr>
-            <a:spLocks noGrp="1"/>
-          </p:cNvSpPr>
-          <p:nvPr>
-            <p:ph type="title"/>
-          </p:nvPr>
-        </p:nvSpPr>
-        <p:spPr/>
-        <p:txBody>
-          <a:bodyPr>
-            <a:normAutofit/>
-          </a:bodyPr>
-          <a:lstStyle/>
-          <a:p>
-            <a:r>
-              <a:rPr dirty="0">
-                <a:solidFill>
-                  <a:schemeClr val="accent1"/>
-                </a:solidFill>
-              </a:rPr>
-              <a:t>“</a:t>
-            </a:r>
-            <a:r>
-              <a:rPr lang="es-ES" dirty="0" err="1">
-                <a:solidFill>
-                  <a:schemeClr val="accent1"/>
-                </a:solidFill>
-              </a:rPr>
-              <a:t>Implementing</a:t>
-            </a:r>
-            <a:r>
-              <a:rPr lang="es-ES" dirty="0">
-                <a:solidFill>
-                  <a:schemeClr val="accent1"/>
-                </a:solidFill>
-              </a:rPr>
-              <a:t> </a:t>
-            </a:r>
-            <a:r>
-              <a:rPr lang="en-US" dirty="0">
-                <a:solidFill>
-                  <a:schemeClr val="accent1"/>
-                </a:solidFill>
-              </a:rPr>
-              <a:t>Agent Based Modelling (ABM) informed by survey data in three steps</a:t>
-            </a:r>
-            <a:r>
-              <a:rPr dirty="0">
-                <a:solidFill>
-                  <a:schemeClr val="accent1"/>
-                </a:solidFill>
-              </a:rPr>
-              <a:t>”</a:t>
-            </a:r>
-          </a:p>
-        </p:txBody>
-      </p:sp>
-      <p:sp>
-        <p:nvSpPr>
-          <p:cNvPr id="3" name="Content Placeholder 2">
-            <a:extLst>
-              <a:ext uri="{FF2B5EF4-FFF2-40B4-BE49-F238E27FC236}">
-                <a16:creationId xmlns:a16="http://schemas.microsoft.com/office/drawing/2014/main" id="{D4DDFDCB-211D-40E7-949E-90959D7FA47B}"/>
-              </a:ext>
-            </a:extLst>
-          </p:cNvPr>
-          <p:cNvSpPr>
-            <a:spLocks noGrp="1"/>
-          </p:cNvSpPr>
-          <p:nvPr>
-            <p:ph idx="1"/>
-          </p:nvPr>
-        </p:nvSpPr>
-        <p:spPr>
-          <a:xfrm>
-            <a:off x="165539" y="2065392"/>
-            <a:ext cx="10996448" cy="4290958"/>
-          </a:xfrm>
-        </p:spPr>
-        <p:txBody>
-          <a:bodyPr>
-            <a:normAutofit/>
-          </a:bodyPr>
-          <a:lstStyle/>
-          <a:p>
-            <a:pPr marL="914400" lvl="1" indent="-457200">
-              <a:buFont typeface="+mj-lt"/>
-              <a:buAutoNum type="arabicPeriod"/>
-            </a:pPr>
-            <a:r>
-              <a:rPr lang="es-ES" dirty="0" err="1"/>
-              <a:t>Estimate</a:t>
-            </a:r>
-            <a:r>
-              <a:rPr lang="es-ES" dirty="0"/>
-              <a:t> individual </a:t>
-            </a:r>
-            <a:r>
-              <a:rPr lang="es-ES" dirty="0" err="1"/>
-              <a:t>probabilities</a:t>
-            </a:r>
-            <a:r>
-              <a:rPr lang="es-ES" dirty="0"/>
-              <a:t> </a:t>
-            </a:r>
-            <a:r>
-              <a:rPr lang="es-ES" dirty="0" err="1"/>
-              <a:t>of</a:t>
-            </a:r>
-            <a:r>
-              <a:rPr lang="es-ES" dirty="0"/>
-              <a:t> </a:t>
-            </a:r>
-            <a:r>
-              <a:rPr lang="es-ES" dirty="0" err="1"/>
-              <a:t>first</a:t>
-            </a:r>
-            <a:r>
-              <a:rPr lang="es-ES" dirty="0"/>
-              <a:t> </a:t>
-            </a:r>
-            <a:r>
-              <a:rPr lang="es-ES" dirty="0" err="1"/>
-              <a:t>international</a:t>
-            </a:r>
-            <a:r>
-              <a:rPr lang="es-ES" dirty="0"/>
-              <a:t> </a:t>
-            </a:r>
-            <a:r>
-              <a:rPr lang="es-ES" dirty="0" err="1"/>
-              <a:t>trip</a:t>
-            </a:r>
-            <a:r>
-              <a:rPr lang="es-ES" dirty="0"/>
-              <a:t> to </a:t>
-            </a:r>
-            <a:r>
-              <a:rPr lang="es-ES" dirty="0" err="1"/>
-              <a:t>destinations</a:t>
-            </a:r>
-            <a:r>
-              <a:rPr lang="es-ES" dirty="0"/>
-              <a:t> </a:t>
-            </a:r>
-            <a:r>
-              <a:rPr lang="es-ES" dirty="0" err="1"/>
-              <a:t>of</a:t>
-            </a:r>
-            <a:r>
-              <a:rPr lang="es-ES" dirty="0"/>
-              <a:t> </a:t>
-            </a:r>
-            <a:r>
-              <a:rPr lang="es-ES" dirty="0" err="1"/>
-              <a:t>interest</a:t>
-            </a:r>
-            <a:r>
-              <a:rPr lang="es-ES" dirty="0"/>
-              <a:t> </a:t>
-            </a:r>
-            <a:r>
-              <a:rPr lang="es-ES" dirty="0" err="1"/>
-              <a:t>using</a:t>
-            </a:r>
-            <a:r>
-              <a:rPr lang="es-ES" dirty="0"/>
-              <a:t> </a:t>
-            </a:r>
-            <a:r>
-              <a:rPr lang="es-ES" dirty="0" err="1"/>
-              <a:t>stats</a:t>
-            </a:r>
-            <a:r>
-              <a:rPr lang="es-ES" dirty="0"/>
-              <a:t> </a:t>
-            </a:r>
-            <a:r>
-              <a:rPr lang="es-ES" dirty="0" err="1"/>
-              <a:t>model</a:t>
-            </a:r>
-            <a:r>
-              <a:rPr lang="es-ES" dirty="0"/>
-              <a:t> </a:t>
-            </a:r>
-            <a:r>
-              <a:rPr lang="es-ES" dirty="0" err="1"/>
-              <a:t>of</a:t>
-            </a:r>
-            <a:r>
-              <a:rPr lang="es-ES" dirty="0"/>
-              <a:t> </a:t>
-            </a:r>
-            <a:r>
-              <a:rPr lang="es-ES" dirty="0" err="1"/>
-              <a:t>interest</a:t>
-            </a:r>
-            <a:r>
-              <a:rPr lang="es-ES" dirty="0"/>
-              <a:t>.</a:t>
-            </a:r>
-          </a:p>
-          <a:p>
-            <a:pPr lvl="2"/>
-            <a:r>
-              <a:rPr b="1" dirty="0"/>
-              <a:t>Event History Analysis</a:t>
-            </a:r>
-            <a:r>
-              <a:rPr dirty="0"/>
-              <a:t>: canonical statistical analysis to study determinants of first international migration trip, when having longitudinal data.</a:t>
-            </a:r>
-            <a:endParaRPr lang="es-ES" dirty="0"/>
-          </a:p>
-          <a:p>
-            <a:pPr marL="914400" lvl="1" indent="-457200">
-              <a:buFont typeface="+mj-lt"/>
-              <a:buAutoNum type="arabicPeriod"/>
-            </a:pPr>
-            <a:r>
-              <a:rPr lang="en-US" dirty="0"/>
-              <a:t>Reproduce individual life histories over time, letting individuals migrate according to the fitted parameters.</a:t>
-            </a:r>
-          </a:p>
-          <a:p>
-            <a:pPr lvl="2"/>
-            <a:r>
-              <a:rPr lang="en-US" dirty="0"/>
-              <a:t>Agent Based Modelling </a:t>
-            </a:r>
-            <a:r>
-              <a:rPr lang="en-US" b="1" dirty="0"/>
-              <a:t>(ABM).</a:t>
-            </a:r>
-            <a:endParaRPr lang="en-US" dirty="0"/>
-          </a:p>
-          <a:p>
-            <a:pPr lvl="2"/>
-            <a:r>
-              <a:rPr lang="en-US" dirty="0"/>
-              <a:t>Decision function is based on estimated coefficients.</a:t>
-            </a:r>
-          </a:p>
-          <a:p>
-            <a:pPr marL="914400" lvl="1" indent="-457200">
-              <a:buFont typeface="+mj-lt"/>
-              <a:buAutoNum type="arabicPeriod"/>
-            </a:pPr>
-            <a:r>
-              <a:rPr lang="es-ES" dirty="0" err="1"/>
-              <a:t>Simulate</a:t>
-            </a:r>
-            <a:r>
-              <a:rPr lang="es-ES" dirty="0"/>
-              <a:t> s</a:t>
-            </a:r>
-            <a:r>
-              <a:rPr dirty="0" err="1"/>
-              <a:t>cenarios</a:t>
-            </a:r>
-            <a:r>
-              <a:rPr dirty="0"/>
-              <a:t> o</a:t>
-            </a:r>
-            <a:r>
-              <a:rPr lang="es-ES" dirty="0"/>
-              <a:t>r</a:t>
-            </a:r>
-            <a:r>
-              <a:rPr dirty="0"/>
-              <a:t> </a:t>
-            </a:r>
-            <a:r>
-              <a:rPr b="1" dirty="0"/>
-              <a:t>what if hypothetical cases </a:t>
-            </a:r>
-            <a:r>
-              <a:rPr dirty="0"/>
-              <a:t>where networks effects are modified.</a:t>
-            </a:r>
-            <a:endParaRPr lang="es-ES" dirty="0"/>
-          </a:p>
-        </p:txBody>
-      </p:sp>
-      <p:sp>
-        <p:nvSpPr>
-          <p:cNvPr id="4" name="Slide Number Placeholder 3">
-            <a:extLst>
-              <a:ext uri="{FF2B5EF4-FFF2-40B4-BE49-F238E27FC236}">
-                <a16:creationId xmlns:a16="http://schemas.microsoft.com/office/drawing/2014/main" id="{4FA20C88-FA29-FFFE-DA34-B2E9497B8C57}"/>
-              </a:ext>
-            </a:extLst>
-          </p:cNvPr>
-          <p:cNvSpPr>
-            <a:spLocks noGrp="1"/>
-          </p:cNvSpPr>
-          <p:nvPr>
-            <p:ph type="sldNum" sz="quarter" idx="12"/>
-          </p:nvPr>
-        </p:nvSpPr>
-        <p:spPr/>
-        <p:txBody>
-          <a:bodyPr/>
-          <a:lstStyle/>
-          <a:p>
-            <a:fld id="{8C659ED5-29AE-4BD1-8EF3-23727FB2C0DE}" type="slidenum">
-              <a:rPr lang="es-ES" smtClean="0"/>
-              <a:t>11</a:t>
-            </a:fld>
-            <a:endParaRPr lang="es-ES"/>
-          </a:p>
-        </p:txBody>
-      </p:sp>
-    </p:spTree>
-    <p:extLst>
-      <p:ext uri="{BB962C8B-B14F-4D97-AF65-F5344CB8AC3E}">
-        <p14:creationId xmlns:p14="http://schemas.microsoft.com/office/powerpoint/2010/main" val="2429233212"/>
-      </p:ext>
-    </p:extLst>
-  </p:cSld>
-  <p:clrMapOvr>
-    <a:masterClrMapping/>
-  </p:clrMapOvr>
-</p:sld>
-</file>
-
-<file path=ppt/slides/slide12.xml><?xml version="1.0" encoding="utf-8"?>
-<p:sld xmlns:a="http://schemas.openxmlformats.org/drawingml/2006/main" xmlns:r="http://schemas.openxmlformats.org/officeDocument/2006/relationships" xmlns:p="http://schemas.openxmlformats.org/presentationml/2006/main">
-  <p:cSld>
-    <p:spTree>
-      <p:nvGrpSpPr>
-        <p:cNvPr id="1" name=""/>
-        <p:cNvGrpSpPr/>
-        <p:nvPr/>
-      </p:nvGrpSpPr>
-      <p:grpSpPr>
-        <a:xfrm>
-          <a:off x="0" y="0"/>
-          <a:ext cx="0" cy="0"/>
-          <a:chOff x="0" y="0"/>
-          <a:chExt cx="0" cy="0"/>
-        </a:xfrm>
-      </p:grpSpPr>
-      <p:sp>
-        <p:nvSpPr>
-          <p:cNvPr id="2" name="Title 1">
-            <a:extLst>
-              <a:ext uri="{FF2B5EF4-FFF2-40B4-BE49-F238E27FC236}">
                 <a16:creationId xmlns:a16="http://schemas.microsoft.com/office/drawing/2014/main" id="{0677AF2A-1E92-4745-8A44-907398137C2A}"/>
               </a:ext>
             </a:extLst>
@@ -4991,7 +4452,7 @@
 </p:sld>
 </file>
 
-<file path=ppt/slides/slide13.xml><?xml version="1.0" encoding="utf-8"?>
+<file path=ppt/slides/slide11.xml><?xml version="1.0" encoding="utf-8"?>
 <p:sld xmlns:a="http://schemas.openxmlformats.org/drawingml/2006/main" xmlns:r="http://schemas.openxmlformats.org/officeDocument/2006/relationships" xmlns:p="http://schemas.openxmlformats.org/presentationml/2006/main">
   <p:cSld>
     <p:spTree>
@@ -5177,7 +4638,7 @@
 </p:sld>
 </file>
 
-<file path=ppt/slides/slide14.xml><?xml version="1.0" encoding="utf-8"?>
+<file path=ppt/slides/slide12.xml><?xml version="1.0" encoding="utf-8"?>
 <p:sld xmlns:a="http://schemas.openxmlformats.org/drawingml/2006/main" xmlns:r="http://schemas.openxmlformats.org/officeDocument/2006/relationships" xmlns:p="http://schemas.openxmlformats.org/presentationml/2006/main">
   <p:cSld>
     <p:spTree>
@@ -5400,7 +4861,7 @@
 </p:sld>
 </file>
 
-<file path=ppt/slides/slide15.xml><?xml version="1.0" encoding="utf-8"?>
+<file path=ppt/slides/slide13.xml><?xml version="1.0" encoding="utf-8"?>
 <p:sld xmlns:a="http://schemas.openxmlformats.org/drawingml/2006/main" xmlns:r="http://schemas.openxmlformats.org/officeDocument/2006/relationships" xmlns:p="http://schemas.openxmlformats.org/presentationml/2006/main">
   <p:cSld>
     <p:spTree>
@@ -5502,7 +4963,7 @@
 </p:sld>
 </file>
 
-<file path=ppt/slides/slide16.xml><?xml version="1.0" encoding="utf-8"?>
+<file path=ppt/slides/slide14.xml><?xml version="1.0" encoding="utf-8"?>
 <p:sld xmlns:a="http://schemas.openxmlformats.org/drawingml/2006/main" xmlns:r="http://schemas.openxmlformats.org/officeDocument/2006/relationships" xmlns:p="http://schemas.openxmlformats.org/presentationml/2006/main">
   <p:cSld>
     <p:spTree>
@@ -5597,7 +5058,7 @@
 </p:sld>
 </file>
 
-<file path=ppt/slides/slide17.xml><?xml version="1.0" encoding="utf-8"?>
+<file path=ppt/slides/slide15.xml><?xml version="1.0" encoding="utf-8"?>
 <p:sld xmlns:a="http://schemas.openxmlformats.org/drawingml/2006/main" xmlns:r="http://schemas.openxmlformats.org/officeDocument/2006/relationships" xmlns:p="http://schemas.openxmlformats.org/presentationml/2006/main">
   <p:cSld>
     <p:spTree>
@@ -5692,7 +5153,7 @@
 </p:sld>
 </file>
 
-<file path=ppt/slides/slide18.xml><?xml version="1.0" encoding="utf-8"?>
+<file path=ppt/slides/slide16.xml><?xml version="1.0" encoding="utf-8"?>
 <p:sld xmlns:a="http://schemas.openxmlformats.org/drawingml/2006/main" xmlns:r="http://schemas.openxmlformats.org/officeDocument/2006/relationships" xmlns:p="http://schemas.openxmlformats.org/presentationml/2006/main">
   <p:cSld>
     <p:spTree>
@@ -5775,7 +5236,238 @@
 </p:sld>
 </file>
 
-<file path=ppt/slides/slide19.xml><?xml version="1.0" encoding="utf-8"?>
+<file path=ppt/slides/slide17.xml><?xml version="1.0" encoding="utf-8"?>
+<p:sld xmlns:a="http://schemas.openxmlformats.org/drawingml/2006/main" xmlns:r="http://schemas.openxmlformats.org/officeDocument/2006/relationships" xmlns:p="http://schemas.openxmlformats.org/presentationml/2006/main">
+  <p:cSld>
+    <p:spTree>
+      <p:nvGrpSpPr>
+        <p:cNvPr id="1" name=""/>
+        <p:cNvGrpSpPr/>
+        <p:nvPr/>
+      </p:nvGrpSpPr>
+      <p:grpSpPr>
+        <a:xfrm>
+          <a:off x="0" y="0"/>
+          <a:ext cx="0" cy="0"/>
+          <a:chOff x="0" y="0"/>
+          <a:chExt cx="0" cy="0"/>
+        </a:xfrm>
+      </p:grpSpPr>
+      <p:sp>
+        <p:nvSpPr>
+          <p:cNvPr id="2" name="Title 1">
+            <a:extLst>
+              <a:ext uri="{FF2B5EF4-FFF2-40B4-BE49-F238E27FC236}">
+                <a16:creationId xmlns:a16="http://schemas.microsoft.com/office/drawing/2014/main" id="{A8EEE588-284E-8692-1643-6AFE5D158BBF}"/>
+              </a:ext>
+            </a:extLst>
+          </p:cNvPr>
+          <p:cNvSpPr>
+            <a:spLocks noGrp="1"/>
+          </p:cNvSpPr>
+          <p:nvPr>
+            <p:ph type="title"/>
+          </p:nvPr>
+        </p:nvSpPr>
+        <p:spPr/>
+        <p:txBody>
+          <a:bodyPr>
+            <a:normAutofit fontScale="90000"/>
+          </a:bodyPr>
+          <a:lstStyle/>
+          <a:p>
+            <a:r>
+              <a:rPr lang="en-US" sz="3600" dirty="0"/>
+              <a:t>Example 3: </a:t>
+            </a:r>
+            <a:br>
+              <a:rPr lang="en-US" sz="3600" dirty="0"/>
+            </a:br>
+            <a:r>
+              <a:rPr lang="en-US" sz="3600" dirty="0" err="1"/>
+              <a:t>Billari</a:t>
+            </a:r>
+            <a:r>
+              <a:rPr lang="en-US" sz="3600" dirty="0"/>
+              <a:t> et al 2007 studied the role of social pressure on aggregated marriage rates.</a:t>
+            </a:r>
+          </a:p>
+        </p:txBody>
+      </p:sp>
+      <p:sp>
+        <p:nvSpPr>
+          <p:cNvPr id="5" name="TextBox 4">
+            <a:extLst>
+              <a:ext uri="{FF2B5EF4-FFF2-40B4-BE49-F238E27FC236}">
+                <a16:creationId xmlns:a16="http://schemas.microsoft.com/office/drawing/2014/main" id="{EFE405F2-F155-E871-05FB-3350BB7AFC3F}"/>
+              </a:ext>
+            </a:extLst>
+          </p:cNvPr>
+          <p:cNvSpPr txBox="1"/>
+          <p:nvPr/>
+        </p:nvSpPr>
+        <p:spPr>
+          <a:xfrm>
+            <a:off x="533455" y="2058807"/>
+            <a:ext cx="10227286" cy="584775"/>
+          </a:xfrm>
+          <a:prstGeom prst="rect">
+            <a:avLst/>
+          </a:prstGeom>
+          <a:noFill/>
+        </p:spPr>
+        <p:txBody>
+          <a:bodyPr wrap="square">
+            <a:spAutoFit/>
+          </a:bodyPr>
+          <a:lstStyle/>
+          <a:p>
+            <a:pPr algn="just"/>
+            <a:r>
+              <a:rPr lang="en-GB" sz="1600" b="0" i="0" u="none" strike="noStrike" baseline="0" dirty="0"/>
+              <a:t>“The </a:t>
+            </a:r>
+            <a:r>
+              <a:rPr lang="en-GB" sz="1600" b="1" i="0" u="none" strike="noStrike" baseline="0" dirty="0"/>
+              <a:t>proportion of married people </a:t>
+            </a:r>
+            <a:r>
+              <a:rPr lang="en-GB" sz="1600" b="0" i="0" u="none" strike="noStrike" baseline="0" dirty="0"/>
+              <a:t>within the network of relevant others, </a:t>
+            </a:r>
+            <a:r>
+              <a:rPr lang="en-GB" sz="1600" b="0" i="1" u="none" strike="noStrike" baseline="0" dirty="0"/>
+              <a:t>pom</a:t>
+            </a:r>
+            <a:r>
+              <a:rPr lang="en-GB" sz="1600" b="0" i="0" u="none" strike="noStrike" baseline="0" dirty="0"/>
+              <a:t>, </a:t>
+            </a:r>
+            <a:r>
+              <a:rPr lang="en-GB" sz="1600" b="1" i="0" u="none" strike="noStrike" baseline="0" dirty="0"/>
+              <a:t>determines the social interaction effect</a:t>
+            </a:r>
+            <a:r>
+              <a:rPr lang="en-GB" sz="1600" b="0" i="0" u="none" strike="noStrike" baseline="0" dirty="0"/>
+              <a:t>…[s]</a:t>
+            </a:r>
+            <a:r>
+              <a:rPr lang="en-GB" sz="1600" b="0" i="0" u="none" strike="noStrike" baseline="0" dirty="0" err="1"/>
+              <a:t>ocial</a:t>
+            </a:r>
+            <a:r>
+              <a:rPr lang="en-GB" sz="1600" b="0" i="0" u="none" strike="noStrike" baseline="0" dirty="0"/>
+              <a:t> pressure is defined as a function of </a:t>
+            </a:r>
+            <a:r>
+              <a:rPr lang="en-GB" sz="1600" b="0" i="1" u="none" strike="noStrike" baseline="0" dirty="0"/>
+              <a:t>pom”</a:t>
+            </a:r>
+            <a:endParaRPr lang="en-US" sz="1600" dirty="0"/>
+          </a:p>
+        </p:txBody>
+      </p:sp>
+      <p:pic>
+        <p:nvPicPr>
+          <p:cNvPr id="9" name="Picture 8">
+            <a:extLst>
+              <a:ext uri="{FF2B5EF4-FFF2-40B4-BE49-F238E27FC236}">
+                <a16:creationId xmlns:a16="http://schemas.microsoft.com/office/drawing/2014/main" id="{9453DA29-CB26-42F7-D9C8-2C6557DBA6A0}"/>
+              </a:ext>
+            </a:extLst>
+          </p:cNvPr>
+          <p:cNvPicPr>
+            <a:picLocks noChangeAspect="1"/>
+          </p:cNvPicPr>
+          <p:nvPr/>
+        </p:nvPicPr>
+        <p:blipFill rotWithShape="1">
+          <a:blip r:embed="rId2"/>
+          <a:srcRect l="37816" t="17544" r="39953" b="71587"/>
+          <a:stretch/>
+        </p:blipFill>
+        <p:spPr>
+          <a:xfrm>
+            <a:off x="1987672" y="2924000"/>
+            <a:ext cx="2710452" cy="745432"/>
+          </a:xfrm>
+          <a:prstGeom prst="rect">
+            <a:avLst/>
+          </a:prstGeom>
+        </p:spPr>
+      </p:pic>
+      <p:pic>
+        <p:nvPicPr>
+          <p:cNvPr id="13" name="Picture 12">
+            <a:extLst>
+              <a:ext uri="{FF2B5EF4-FFF2-40B4-BE49-F238E27FC236}">
+                <a16:creationId xmlns:a16="http://schemas.microsoft.com/office/drawing/2014/main" id="{FD6BF1E2-F5FF-B952-DFFE-A23D863FB545}"/>
+              </a:ext>
+            </a:extLst>
+          </p:cNvPr>
+          <p:cNvPicPr>
+            <a:picLocks noChangeAspect="1"/>
+          </p:cNvPicPr>
+          <p:nvPr/>
+        </p:nvPicPr>
+        <p:blipFill rotWithShape="1">
+          <a:blip r:embed="rId3"/>
+          <a:srcRect l="30710" t="32000" r="37789" b="22246"/>
+          <a:stretch/>
+        </p:blipFill>
+        <p:spPr>
+          <a:xfrm>
+            <a:off x="1500352" y="3596477"/>
+            <a:ext cx="3840480" cy="3137836"/>
+          </a:xfrm>
+          <a:prstGeom prst="rect">
+            <a:avLst/>
+          </a:prstGeom>
+        </p:spPr>
+      </p:pic>
+      <p:pic>
+        <p:nvPicPr>
+          <p:cNvPr id="15" name="Picture 14">
+            <a:extLst>
+              <a:ext uri="{FF2B5EF4-FFF2-40B4-BE49-F238E27FC236}">
+                <a16:creationId xmlns:a16="http://schemas.microsoft.com/office/drawing/2014/main" id="{E2DD8960-B220-0186-3294-9724D72C7809}"/>
+              </a:ext>
+            </a:extLst>
+          </p:cNvPr>
+          <p:cNvPicPr>
+            <a:picLocks noChangeAspect="1"/>
+          </p:cNvPicPr>
+          <p:nvPr/>
+        </p:nvPicPr>
+        <p:blipFill rotWithShape="1">
+          <a:blip r:embed="rId4"/>
+          <a:srcRect l="34497" t="29613" r="35470" b="40773"/>
+          <a:stretch/>
+        </p:blipFill>
+        <p:spPr>
+          <a:xfrm>
+            <a:off x="6347112" y="2778663"/>
+            <a:ext cx="5216894" cy="2893570"/>
+          </a:xfrm>
+          <a:prstGeom prst="rect">
+            <a:avLst/>
+          </a:prstGeom>
+        </p:spPr>
+      </p:pic>
+    </p:spTree>
+    <p:extLst>
+      <p:ext uri="{BB962C8B-B14F-4D97-AF65-F5344CB8AC3E}">
+        <p14:creationId xmlns:p14="http://schemas.microsoft.com/office/powerpoint/2010/main" val="3466496809"/>
+      </p:ext>
+    </p:extLst>
+  </p:cSld>
+  <p:clrMapOvr>
+    <a:masterClrMapping/>
+  </p:clrMapOvr>
+</p:sld>
+</file>
+
+<file path=ppt/slides/slide18.xml><?xml version="1.0" encoding="utf-8"?>
 <p:sld xmlns:a="http://schemas.openxmlformats.org/drawingml/2006/main" xmlns:r="http://schemas.openxmlformats.org/officeDocument/2006/relationships" xmlns:p="http://schemas.openxmlformats.org/presentationml/2006/main">
   <p:cSld>
     <p:bg>
@@ -5965,6 +5657,273 @@
 </p:sld>
 </file>
 
+<file path=ppt/slides/slide19.xml><?xml version="1.0" encoding="utf-8"?>
+<p:sld xmlns:a="http://schemas.openxmlformats.org/drawingml/2006/main" xmlns:r="http://schemas.openxmlformats.org/officeDocument/2006/relationships" xmlns:p="http://schemas.openxmlformats.org/presentationml/2006/main">
+  <p:cSld>
+    <p:spTree>
+      <p:nvGrpSpPr>
+        <p:cNvPr id="1" name=""/>
+        <p:cNvGrpSpPr/>
+        <p:nvPr/>
+      </p:nvGrpSpPr>
+      <p:grpSpPr>
+        <a:xfrm>
+          <a:off x="0" y="0"/>
+          <a:ext cx="0" cy="0"/>
+          <a:chOff x="0" y="0"/>
+          <a:chExt cx="0" cy="0"/>
+        </a:xfrm>
+      </p:grpSpPr>
+      <p:sp>
+        <p:nvSpPr>
+          <p:cNvPr id="2" name="Title 1">
+            <a:extLst>
+              <a:ext uri="{FF2B5EF4-FFF2-40B4-BE49-F238E27FC236}">
+                <a16:creationId xmlns:a16="http://schemas.microsoft.com/office/drawing/2014/main" id="{0677AF2A-1E92-4745-8A44-907398137C2A}"/>
+              </a:ext>
+            </a:extLst>
+          </p:cNvPr>
+          <p:cNvSpPr>
+            <a:spLocks noGrp="1"/>
+          </p:cNvSpPr>
+          <p:nvPr>
+            <p:ph type="title"/>
+          </p:nvPr>
+        </p:nvSpPr>
+        <p:spPr/>
+        <p:txBody>
+          <a:bodyPr>
+            <a:normAutofit/>
+          </a:bodyPr>
+          <a:lstStyle/>
+          <a:p>
+            <a:r>
+              <a:rPr dirty="0">
+                <a:solidFill>
+                  <a:schemeClr val="accent1"/>
+                </a:solidFill>
+              </a:rPr>
+              <a:t>Aim and Research question.</a:t>
+            </a:r>
+          </a:p>
+        </p:txBody>
+      </p:sp>
+      <p:sp>
+        <p:nvSpPr>
+          <p:cNvPr id="3" name="Content Placeholder 2">
+            <a:extLst>
+              <a:ext uri="{FF2B5EF4-FFF2-40B4-BE49-F238E27FC236}">
+                <a16:creationId xmlns:a16="http://schemas.microsoft.com/office/drawing/2014/main" id="{D4DDFDCB-211D-40E7-949E-90959D7FA47B}"/>
+              </a:ext>
+            </a:extLst>
+          </p:cNvPr>
+          <p:cNvSpPr>
+            <a:spLocks noGrp="1"/>
+          </p:cNvSpPr>
+          <p:nvPr>
+            <p:ph idx="1"/>
+          </p:nvPr>
+        </p:nvSpPr>
+        <p:spPr>
+          <a:xfrm>
+            <a:off x="711200" y="1831975"/>
+            <a:ext cx="10515600" cy="4351338"/>
+          </a:xfrm>
+        </p:spPr>
+        <p:txBody>
+          <a:bodyPr>
+            <a:normAutofit/>
+          </a:bodyPr>
+          <a:lstStyle/>
+          <a:p>
+            <a:pPr lvl="1"/>
+            <a:r>
+              <a:rPr b="1" dirty="0"/>
+              <a:t>Aim:</a:t>
+            </a:r>
+            <a:r>
+              <a:rPr dirty="0"/>
+              <a:t> to describe the global implications of migrant networks formed at the individual level, while accounting for time-varying demographic individual characteristics and macro levels changes.</a:t>
+            </a:r>
+          </a:p>
+          <a:p>
+            <a:pPr lvl="2"/>
+            <a:r>
+              <a:rPr dirty="0"/>
+              <a:t>Case study: Colombian international migration</a:t>
+            </a:r>
+            <a:r>
+              <a:rPr lang="es-ES" dirty="0"/>
+              <a:t> </a:t>
+            </a:r>
+            <a:r>
+              <a:rPr lang="es-ES" dirty="0" err="1"/>
+              <a:t>to</a:t>
+            </a:r>
+            <a:r>
+              <a:rPr lang="es-ES" dirty="0"/>
+              <a:t> LAC, US, and </a:t>
+            </a:r>
+            <a:r>
+              <a:rPr lang="es-ES" dirty="0" err="1"/>
+              <a:t>Spain</a:t>
+            </a:r>
+            <a:r>
+              <a:rPr dirty="0"/>
+              <a:t> from 196</a:t>
+            </a:r>
+            <a:r>
+              <a:rPr lang="es-ES" dirty="0"/>
+              <a:t>1</a:t>
+            </a:r>
+            <a:r>
+              <a:rPr dirty="0"/>
+              <a:t> to 20</a:t>
+            </a:r>
+            <a:r>
+              <a:rPr lang="es-ES" dirty="0"/>
+              <a:t>09</a:t>
+            </a:r>
+            <a:r>
+              <a:rPr dirty="0"/>
+              <a:t>.</a:t>
+            </a:r>
+          </a:p>
+          <a:p>
+            <a:pPr lvl="1"/>
+            <a:r>
+              <a:rPr b="1" dirty="0"/>
+              <a:t>Research question: </a:t>
+            </a:r>
+            <a:endParaRPr lang="es-ES" b="1" dirty="0"/>
+          </a:p>
+          <a:p>
+            <a:pPr lvl="2"/>
+            <a:r>
+              <a:rPr lang="es-ES" dirty="0"/>
+              <a:t>Macro: H</a:t>
+            </a:r>
+            <a:r>
+              <a:rPr dirty="0"/>
+              <a:t>ow the number of migrants, annual and cumulative international migration rates of Colombians</a:t>
+            </a:r>
+            <a:r>
+              <a:rPr lang="es-ES" dirty="0"/>
+              <a:t> </a:t>
+            </a:r>
+            <a:r>
+              <a:rPr lang="es-ES" dirty="0" err="1"/>
+              <a:t>to</a:t>
+            </a:r>
+            <a:r>
+              <a:rPr lang="es-ES" dirty="0"/>
+              <a:t> LAC, US, and </a:t>
+            </a:r>
+            <a:r>
+              <a:rPr lang="es-ES" dirty="0" err="1"/>
+              <a:t>Spain</a:t>
+            </a:r>
+            <a:r>
+              <a:rPr dirty="0"/>
+              <a:t> are affected by changes in the effect of migrant networks formed at the individual level.</a:t>
+            </a:r>
+          </a:p>
+          <a:p>
+            <a:pPr lvl="3"/>
+            <a:r>
+              <a:rPr dirty="0"/>
+              <a:t>Are number of migrants relatively constant in the absence of network effects? Do we still observe an S-shaped curve in the cumulative number of migrants and migration rates in the scenario when network effects are disabled?</a:t>
+            </a:r>
+            <a:endParaRPr lang="es-ES" dirty="0"/>
+          </a:p>
+          <a:p>
+            <a:pPr lvl="3"/>
+            <a:r>
+              <a:rPr lang="es-ES" dirty="0" err="1"/>
+              <a:t>Required</a:t>
+            </a:r>
+            <a:r>
+              <a:rPr lang="es-ES" dirty="0"/>
+              <a:t> </a:t>
+            </a:r>
+            <a:r>
+              <a:rPr lang="es-ES" dirty="0" err="1"/>
+              <a:t>previous</a:t>
+            </a:r>
+            <a:r>
+              <a:rPr lang="es-ES" dirty="0"/>
+              <a:t> step – </a:t>
+            </a:r>
+            <a:r>
+              <a:rPr lang="es-ES" dirty="0" err="1"/>
+              <a:t>effect</a:t>
+            </a:r>
+            <a:r>
+              <a:rPr lang="es-ES" dirty="0"/>
+              <a:t> at micro </a:t>
+            </a:r>
+            <a:r>
+              <a:rPr lang="es-ES" dirty="0" err="1"/>
+              <a:t>level</a:t>
+            </a:r>
+            <a:r>
+              <a:rPr lang="es-ES" dirty="0"/>
+              <a:t>: </a:t>
+            </a:r>
+            <a:r>
+              <a:rPr lang="en-US" dirty="0"/>
+              <a:t>How are individual probabilities of international migration of Colombians to LAC, US, and Spain affected by migrant networks?</a:t>
+            </a:r>
+            <a:endParaRPr lang="es-ES" dirty="0"/>
+          </a:p>
+          <a:p>
+            <a:pPr lvl="3"/>
+            <a:endParaRPr dirty="0"/>
+          </a:p>
+        </p:txBody>
+      </p:sp>
+      <p:sp>
+        <p:nvSpPr>
+          <p:cNvPr id="4" name="Slide Number Placeholder 3">
+            <a:extLst>
+              <a:ext uri="{FF2B5EF4-FFF2-40B4-BE49-F238E27FC236}">
+                <a16:creationId xmlns:a16="http://schemas.microsoft.com/office/drawing/2014/main" id="{C2E79765-FE27-483E-273C-29718AF1A6F3}"/>
+              </a:ext>
+            </a:extLst>
+          </p:cNvPr>
+          <p:cNvSpPr>
+            <a:spLocks noGrp="1"/>
+          </p:cNvSpPr>
+          <p:nvPr>
+            <p:ph type="sldNum" sz="quarter" idx="12"/>
+          </p:nvPr>
+        </p:nvSpPr>
+        <p:spPr/>
+        <p:txBody>
+          <a:bodyPr/>
+          <a:lstStyle/>
+          <a:p>
+            <a:fld id="{8C659ED5-29AE-4BD1-8EF3-23727FB2C0DE}" type="slidenum">
+              <a:rPr lang="es-ES" smtClean="0"/>
+              <a:t>19</a:t>
+            </a:fld>
+            <a:endParaRPr lang="es-ES"/>
+          </a:p>
+        </p:txBody>
+      </p:sp>
+    </p:spTree>
+    <p:extLst>
+      <p:ext uri="{BB962C8B-B14F-4D97-AF65-F5344CB8AC3E}">
+        <p14:creationId xmlns:p14="http://schemas.microsoft.com/office/powerpoint/2010/main" val="187701626"/>
+      </p:ext>
+    </p:extLst>
+  </p:cSld>
+  <p:clrMapOvr>
+    <a:masterClrMapping/>
+  </p:clrMapOvr>
+</p:sld>
+</file>
+
 <file path=ppt/slides/slide2.xml><?xml version="1.0" encoding="utf-8"?>
 <p:sld xmlns:a="http://schemas.openxmlformats.org/drawingml/2006/main" xmlns:r="http://schemas.openxmlformats.org/officeDocument/2006/relationships" xmlns:p="http://schemas.openxmlformats.org/presentationml/2006/main">
   <p:cSld>
@@ -5987,7 +5946,7 @@
           <p:cNvPr id="2" name="Title 1">
             <a:extLst>
               <a:ext uri="{FF2B5EF4-FFF2-40B4-BE49-F238E27FC236}">
-                <a16:creationId xmlns:a16="http://schemas.microsoft.com/office/drawing/2014/main" id="{8D978DE7-DFCC-2D22-532E-E7B51E70B786}"/>
+                <a16:creationId xmlns:a16="http://schemas.microsoft.com/office/drawing/2014/main" id="{EF622F83-EA54-B630-935F-FB12184E605A}"/>
               </a:ext>
             </a:extLst>
           </p:cNvPr>
@@ -6004,77 +5963,91 @@
           <a:lstStyle/>
           <a:p>
             <a:r>
+              <a:rPr lang="es-ES" dirty="0" err="1"/>
+              <a:t>Structure</a:t>
+            </a:r>
+            <a:endParaRPr lang="en-GB" dirty="0"/>
+          </a:p>
+        </p:txBody>
+      </p:sp>
+      <p:sp>
+        <p:nvSpPr>
+          <p:cNvPr id="3" name="Content Placeholder 2">
+            <a:extLst>
+              <a:ext uri="{FF2B5EF4-FFF2-40B4-BE49-F238E27FC236}">
+                <a16:creationId xmlns:a16="http://schemas.microsoft.com/office/drawing/2014/main" id="{59F83986-57A7-1335-ADBA-66281645B0D3}"/>
+              </a:ext>
+            </a:extLst>
+          </p:cNvPr>
+          <p:cNvSpPr>
+            <a:spLocks noGrp="1"/>
+          </p:cNvSpPr>
+          <p:nvPr>
+            <p:ph idx="1"/>
+          </p:nvPr>
+        </p:nvSpPr>
+        <p:spPr>
+          <a:xfrm>
+            <a:off x="838200" y="1825624"/>
+            <a:ext cx="10515600" cy="1747893"/>
+          </a:xfrm>
+        </p:spPr>
+        <p:txBody>
+          <a:bodyPr>
+            <a:normAutofit/>
+          </a:bodyPr>
+          <a:lstStyle/>
+          <a:p>
+            <a:pPr marL="514350" indent="-514350">
+              <a:buFont typeface="+mj-lt"/>
+              <a:buAutoNum type="arabicPeriod"/>
+            </a:pPr>
+            <a:r>
               <a:rPr lang="en-US" dirty="0"/>
-              <a:t>To do</a:t>
-            </a:r>
-          </a:p>
-        </p:txBody>
-      </p:sp>
-      <p:sp>
-        <p:nvSpPr>
-          <p:cNvPr id="3" name="Content Placeholder 2">
-            <a:extLst>
-              <a:ext uri="{FF2B5EF4-FFF2-40B4-BE49-F238E27FC236}">
-                <a16:creationId xmlns:a16="http://schemas.microsoft.com/office/drawing/2014/main" id="{A584E8C1-B92A-DA36-F03D-22435A683335}"/>
-              </a:ext>
-            </a:extLst>
-          </p:cNvPr>
-          <p:cNvSpPr>
-            <a:spLocks noGrp="1"/>
-          </p:cNvSpPr>
-          <p:nvPr>
-            <p:ph idx="1"/>
-          </p:nvPr>
-        </p:nvSpPr>
-        <p:spPr/>
-        <p:txBody>
-          <a:bodyPr/>
-          <a:lstStyle/>
-          <a:p>
+              <a:t>Agent-based models: what is this method and why to use it?</a:t>
+            </a:r>
+          </a:p>
+          <a:p>
+            <a:pPr marL="514350" indent="-514350">
+              <a:buFont typeface="+mj-lt"/>
+              <a:buAutoNum type="arabicPeriod"/>
+            </a:pPr>
             <a:r>
               <a:rPr lang="en-US" dirty="0"/>
-              <a:t>Script</a:t>
-            </a:r>
-          </a:p>
-          <a:p>
+              <a:t>Some examples + code.</a:t>
+            </a:r>
+          </a:p>
+          <a:p>
+            <a:pPr marL="514350" indent="-514350">
+              <a:buFont typeface="+mj-lt"/>
+              <a:buAutoNum type="arabicPeriod"/>
+            </a:pPr>
             <a:r>
               <a:rPr lang="en-US" dirty="0"/>
-              <a:t>Examples of agents and agents shift</a:t>
+              <a:t>Survey-based ABM + code</a:t>
             </a:r>
           </a:p>
           <a:p>
             <a:pPr lvl="1"/>
-            <a:r>
-              <a:rPr lang="en-US" dirty="0"/>
-              <a:t>Theoretical</a:t>
-            </a:r>
+            <a:endParaRPr lang="en-US" dirty="0"/>
           </a:p>
           <a:p>
             <a:pPr lvl="1"/>
-            <a:r>
-              <a:rPr lang="en-US" dirty="0"/>
-              <a:t>Empirical</a:t>
-            </a:r>
-          </a:p>
-          <a:p>
-            <a:r>
-              <a:rPr lang="en-US" dirty="0"/>
-              <a:t>Other examples</a:t>
-            </a:r>
+            <a:endParaRPr lang="en-US" dirty="0"/>
           </a:p>
           <a:p>
             <a:pPr lvl="1"/>
-            <a:r>
-              <a:rPr lang="en-US" dirty="0"/>
-              <a:t>Vectors</a:t>
-            </a:r>
+            <a:endParaRPr lang="en-US" dirty="0"/>
+          </a:p>
+          <a:p>
+            <a:endParaRPr lang="en-US" dirty="0"/>
           </a:p>
         </p:txBody>
       </p:sp>
     </p:spTree>
     <p:extLst>
       <p:ext uri="{BB962C8B-B14F-4D97-AF65-F5344CB8AC3E}">
-        <p14:creationId xmlns:p14="http://schemas.microsoft.com/office/powerpoint/2010/main" val="1402063359"/>
+        <p14:creationId xmlns:p14="http://schemas.microsoft.com/office/powerpoint/2010/main" val="2737110927"/>
       </p:ext>
     </p:extLst>
   </p:cSld>
@@ -6106,7 +6079,7 @@
           <p:cNvPr id="2" name="Title 1">
             <a:extLst>
               <a:ext uri="{FF2B5EF4-FFF2-40B4-BE49-F238E27FC236}">
-                <a16:creationId xmlns:a16="http://schemas.microsoft.com/office/drawing/2014/main" id="{0677AF2A-1E92-4745-8A44-907398137C2A}"/>
+                <a16:creationId xmlns:a16="http://schemas.microsoft.com/office/drawing/2014/main" id="{AE16F414-813E-86B6-52C9-F2AE5CFDE099}"/>
               </a:ext>
             </a:extLst>
           </p:cNvPr>
@@ -6119,229 +6092,591 @@
         </p:nvSpPr>
         <p:spPr/>
         <p:txBody>
+          <a:bodyPr/>
+          <a:lstStyle/>
+          <a:p>
+            <a:r>
+              <a:rPr lang="es-ES" dirty="0" err="1"/>
+              <a:t>References</a:t>
+            </a:r>
+            <a:endParaRPr lang="en-GB" dirty="0"/>
+          </a:p>
+        </p:txBody>
+      </p:sp>
+      <p:sp>
+        <p:nvSpPr>
+          <p:cNvPr id="3" name="Content Placeholder 2">
+            <a:extLst>
+              <a:ext uri="{FF2B5EF4-FFF2-40B4-BE49-F238E27FC236}">
+                <a16:creationId xmlns:a16="http://schemas.microsoft.com/office/drawing/2014/main" id="{C6E41935-3B33-AC41-5897-84956CCD9CF7}"/>
+              </a:ext>
+            </a:extLst>
+          </p:cNvPr>
+          <p:cNvSpPr>
+            <a:spLocks noGrp="1"/>
+          </p:cNvSpPr>
+          <p:nvPr>
+            <p:ph idx="1"/>
+          </p:nvPr>
+        </p:nvSpPr>
+        <p:spPr/>
+        <p:txBody>
           <a:bodyPr>
-            <a:normAutofit/>
+            <a:normAutofit fontScale="85000" lnSpcReduction="10000"/>
           </a:bodyPr>
           <a:lstStyle/>
           <a:p>
             <a:r>
-              <a:rPr dirty="0">
-                <a:solidFill>
-                  <a:schemeClr val="accent1"/>
-                </a:solidFill>
+              <a:rPr lang="en-GB" sz="1800" dirty="0" err="1">
+                <a:latin typeface="Calibri" panose="020F0502020204030204" pitchFamily="34" charset="0"/>
+                <a:cs typeface="Calibri" panose="020F0502020204030204" pitchFamily="34" charset="0"/>
+                <a:hlinkClick r:id="rId2">
+                  <a:extLst>
+                    <a:ext uri="{A12FA001-AC4F-418D-AE19-62706E023703}">
+                      <ahyp:hlinkClr xmlns:ahyp="http://schemas.microsoft.com/office/drawing/2018/hyperlinkcolor" val="tx"/>
+                    </a:ext>
+                  </a:extLst>
+                </a:hlinkClick>
               </a:rPr>
-              <a:t>Aim and Research question.</a:t>
-            </a:r>
-          </a:p>
-        </p:txBody>
-      </p:sp>
-      <p:sp>
-        <p:nvSpPr>
-          <p:cNvPr id="3" name="Content Placeholder 2">
-            <a:extLst>
-              <a:ext uri="{FF2B5EF4-FFF2-40B4-BE49-F238E27FC236}">
-                <a16:creationId xmlns:a16="http://schemas.microsoft.com/office/drawing/2014/main" id="{D4DDFDCB-211D-40E7-949E-90959D7FA47B}"/>
-              </a:ext>
-            </a:extLst>
-          </p:cNvPr>
-          <p:cNvSpPr>
-            <a:spLocks noGrp="1"/>
-          </p:cNvSpPr>
-          <p:nvPr>
-            <p:ph idx="1"/>
-          </p:nvPr>
-        </p:nvSpPr>
-        <p:spPr>
-          <a:xfrm>
-            <a:off x="711200" y="1831975"/>
-            <a:ext cx="10515600" cy="4351338"/>
-          </a:xfrm>
-        </p:spPr>
-        <p:txBody>
-          <a:bodyPr>
-            <a:normAutofit/>
-          </a:bodyPr>
-          <a:lstStyle/>
-          <a:p>
-            <a:pPr lvl="1"/>
-            <a:r>
-              <a:rPr b="1" dirty="0"/>
-              <a:t>Aim:</a:t>
-            </a:r>
-            <a:r>
-              <a:rPr dirty="0"/>
-              <a:t> to describe the global implications of migrant networks formed at the individual level, while accounting for time-varying demographic individual characteristics and macro levels changes.</a:t>
-            </a:r>
-          </a:p>
-          <a:p>
-            <a:pPr lvl="2"/>
-            <a:r>
-              <a:rPr dirty="0"/>
-              <a:t>Case study: Colombian international migration</a:t>
-            </a:r>
-            <a:r>
-              <a:rPr lang="es-ES" dirty="0"/>
-              <a:t> </a:t>
-            </a:r>
-            <a:r>
-              <a:rPr lang="es-ES" dirty="0" err="1"/>
-              <a:t>to</a:t>
-            </a:r>
-            <a:r>
-              <a:rPr lang="es-ES" dirty="0"/>
-              <a:t> LAC, US, and </a:t>
-            </a:r>
-            <a:r>
-              <a:rPr lang="es-ES" dirty="0" err="1"/>
-              <a:t>Spain</a:t>
-            </a:r>
-            <a:r>
-              <a:rPr dirty="0"/>
-              <a:t> from 196</a:t>
-            </a:r>
-            <a:r>
-              <a:rPr lang="es-ES" dirty="0"/>
-              <a:t>1</a:t>
-            </a:r>
-            <a:r>
-              <a:rPr dirty="0"/>
-              <a:t> to 20</a:t>
-            </a:r>
-            <a:r>
-              <a:rPr lang="es-ES" dirty="0"/>
-              <a:t>09</a:t>
-            </a:r>
-            <a:r>
-              <a:rPr dirty="0"/>
-              <a:t>.</a:t>
-            </a:r>
-          </a:p>
-          <a:p>
-            <a:pPr lvl="1"/>
-            <a:r>
-              <a:rPr b="1" dirty="0"/>
-              <a:t>Research question: </a:t>
-            </a:r>
-            <a:endParaRPr lang="es-ES" b="1" dirty="0"/>
-          </a:p>
-          <a:p>
-            <a:pPr lvl="2"/>
-            <a:r>
-              <a:rPr lang="es-ES" dirty="0"/>
-              <a:t>Macro: H</a:t>
-            </a:r>
-            <a:r>
-              <a:rPr dirty="0"/>
-              <a:t>ow the number of migrants, annual and cumulative international migration rates of Colombians</a:t>
-            </a:r>
-            <a:r>
-              <a:rPr lang="es-ES" dirty="0"/>
-              <a:t> </a:t>
-            </a:r>
-            <a:r>
-              <a:rPr lang="es-ES" dirty="0" err="1"/>
-              <a:t>to</a:t>
-            </a:r>
-            <a:r>
-              <a:rPr lang="es-ES" dirty="0"/>
-              <a:t> LAC, US, and </a:t>
-            </a:r>
-            <a:r>
-              <a:rPr lang="es-ES" dirty="0" err="1"/>
-              <a:t>Spain</a:t>
-            </a:r>
-            <a:r>
-              <a:rPr dirty="0"/>
-              <a:t> are affected by changes in the effect of migrant networks formed at the individual level.</a:t>
-            </a:r>
-          </a:p>
-          <a:p>
-            <a:pPr lvl="3"/>
-            <a:r>
-              <a:rPr dirty="0"/>
-              <a:t>Are number of migrants relatively constant in the absence of network effects? Do we still observe an S-shaped curve in the cumulative number of migrants and migration rates in the scenario when network effects are disabled?</a:t>
-            </a:r>
-            <a:endParaRPr lang="es-ES" dirty="0"/>
-          </a:p>
-          <a:p>
-            <a:pPr lvl="3"/>
-            <a:r>
-              <a:rPr lang="es-ES" dirty="0" err="1"/>
-              <a:t>Required</a:t>
-            </a:r>
-            <a:r>
-              <a:rPr lang="es-ES" dirty="0"/>
-              <a:t> </a:t>
-            </a:r>
-            <a:r>
-              <a:rPr lang="es-ES" dirty="0" err="1"/>
-              <a:t>previous</a:t>
-            </a:r>
-            <a:r>
-              <a:rPr lang="es-ES" dirty="0"/>
-              <a:t> step – </a:t>
-            </a:r>
-            <a:r>
-              <a:rPr lang="es-ES" dirty="0" err="1"/>
-              <a:t>effect</a:t>
-            </a:r>
-            <a:r>
-              <a:rPr lang="es-ES" dirty="0"/>
-              <a:t> at micro </a:t>
-            </a:r>
-            <a:r>
-              <a:rPr lang="es-ES" dirty="0" err="1"/>
-              <a:t>level</a:t>
-            </a:r>
-            <a:r>
-              <a:rPr lang="es-ES" dirty="0"/>
-              <a:t>: </a:t>
-            </a:r>
-            <a:r>
-              <a:rPr lang="en-US" dirty="0"/>
-              <a:t>How are individual probabilities of international migration of Colombians to LAC, US, and Spain affected by migrant networks?</a:t>
-            </a:r>
-            <a:endParaRPr lang="es-ES" dirty="0"/>
-          </a:p>
-          <a:p>
-            <a:pPr lvl="3"/>
-            <a:endParaRPr dirty="0"/>
-          </a:p>
-        </p:txBody>
-      </p:sp>
-      <p:sp>
-        <p:nvSpPr>
-          <p:cNvPr id="4" name="Slide Number Placeholder 3">
-            <a:extLst>
-              <a:ext uri="{FF2B5EF4-FFF2-40B4-BE49-F238E27FC236}">
-                <a16:creationId xmlns:a16="http://schemas.microsoft.com/office/drawing/2014/main" id="{C2E79765-FE27-483E-273C-29718AF1A6F3}"/>
-              </a:ext>
-            </a:extLst>
-          </p:cNvPr>
-          <p:cNvSpPr>
-            <a:spLocks noGrp="1"/>
-          </p:cNvSpPr>
-          <p:nvPr>
-            <p:ph type="sldNum" sz="quarter" idx="12"/>
-          </p:nvPr>
-        </p:nvSpPr>
-        <p:spPr/>
-        <p:txBody>
-          <a:bodyPr/>
-          <a:lstStyle/>
-          <a:p>
-            <a:fld id="{8C659ED5-29AE-4BD1-8EF3-23727FB2C0DE}" type="slidenum">
-              <a:rPr lang="es-ES" smtClean="0"/>
-              <a:t>20</a:t>
-            </a:fld>
-            <a:endParaRPr lang="es-ES"/>
+              <a:t>Billari</a:t>
+            </a:r>
+            <a:r>
+              <a:rPr lang="en-GB" sz="1800" dirty="0">
+                <a:latin typeface="Calibri" panose="020F0502020204030204" pitchFamily="34" charset="0"/>
+                <a:cs typeface="Calibri" panose="020F0502020204030204" pitchFamily="34" charset="0"/>
+              </a:rPr>
+              <a:t>, </a:t>
+            </a:r>
+            <a:r>
+              <a:rPr lang="en-GB" sz="1800" dirty="0" err="1">
+                <a:latin typeface="Calibri" panose="020F0502020204030204" pitchFamily="34" charset="0"/>
+                <a:cs typeface="Calibri" panose="020F0502020204030204" pitchFamily="34" charset="0"/>
+                <a:hlinkClick r:id="rId3">
+                  <a:extLst>
+                    <a:ext uri="{A12FA001-AC4F-418D-AE19-62706E023703}">
+                      <ahyp:hlinkClr xmlns:ahyp="http://schemas.microsoft.com/office/drawing/2018/hyperlinkcolor" val="tx"/>
+                    </a:ext>
+                  </a:extLst>
+                </a:hlinkClick>
+              </a:rPr>
+              <a:t>Prskawetz</a:t>
+            </a:r>
+            <a:r>
+              <a:rPr lang="en-GB" sz="1800" dirty="0">
+                <a:latin typeface="Calibri" panose="020F0502020204030204" pitchFamily="34" charset="0"/>
+                <a:cs typeface="Calibri" panose="020F0502020204030204" pitchFamily="34" charset="0"/>
+              </a:rPr>
+              <a:t>, Aparicio, </a:t>
+            </a:r>
+            <a:r>
+              <a:rPr lang="en-GB" sz="1800" dirty="0">
+                <a:latin typeface="Calibri" panose="020F0502020204030204" pitchFamily="34" charset="0"/>
+                <a:cs typeface="Calibri" panose="020F0502020204030204" pitchFamily="34" charset="0"/>
+                <a:hlinkClick r:id="rId4">
+                  <a:extLst>
+                    <a:ext uri="{A12FA001-AC4F-418D-AE19-62706E023703}">
+                      <ahyp:hlinkClr xmlns:ahyp="http://schemas.microsoft.com/office/drawing/2018/hyperlinkcolor" val="tx"/>
+                    </a:ext>
+                  </a:extLst>
+                </a:hlinkClick>
+              </a:rPr>
+              <a:t>Fent</a:t>
+            </a:r>
+            <a:r>
+              <a:rPr lang="en-US" sz="1800" dirty="0">
+                <a:latin typeface="Calibri" panose="020F0502020204030204" pitchFamily="34" charset="0"/>
+                <a:cs typeface="Calibri" panose="020F0502020204030204" pitchFamily="34" charset="0"/>
+              </a:rPr>
+              <a:t> (2007) </a:t>
+            </a:r>
+            <a:r>
+              <a:rPr lang="en-GB" sz="1800" dirty="0">
+                <a:latin typeface="Calibri" panose="020F0502020204030204" pitchFamily="34" charset="0"/>
+                <a:cs typeface="Calibri" panose="020F0502020204030204" pitchFamily="34" charset="0"/>
+              </a:rPr>
+              <a:t>The "Wedding-Ring": An agent-based marriage model based on social interaction. </a:t>
+            </a:r>
+            <a:r>
+              <a:rPr lang="en-GB" sz="1800" dirty="0" err="1">
+                <a:latin typeface="Calibri" panose="020F0502020204030204" pitchFamily="34" charset="0"/>
+                <a:cs typeface="Calibri" panose="020F0502020204030204" pitchFamily="34" charset="0"/>
+              </a:rPr>
+              <a:t>DemRes</a:t>
+            </a:r>
+            <a:r>
+              <a:rPr lang="en-GB" sz="1800" dirty="0">
+                <a:latin typeface="Calibri" panose="020F0502020204030204" pitchFamily="34" charset="0"/>
+                <a:cs typeface="Calibri" panose="020F0502020204030204" pitchFamily="34" charset="0"/>
+              </a:rPr>
+              <a:t> 17, 59-82.</a:t>
+            </a:r>
+          </a:p>
+          <a:p>
+            <a:r>
+              <a:rPr lang="en-US" sz="1800" dirty="0" err="1">
+                <a:effectLst/>
+                <a:latin typeface="Calibri" panose="020F0502020204030204" pitchFamily="34" charset="0"/>
+                <a:ea typeface="Calibri" panose="020F0502020204030204" pitchFamily="34" charset="0"/>
+                <a:cs typeface="Calibri" panose="020F0502020204030204" pitchFamily="34" charset="0"/>
+              </a:rPr>
+              <a:t>Klabunde</a:t>
+            </a:r>
+            <a:r>
+              <a:rPr lang="en-US" sz="1800" dirty="0">
+                <a:effectLst/>
+                <a:latin typeface="Calibri" panose="020F0502020204030204" pitchFamily="34" charset="0"/>
+                <a:ea typeface="Calibri" panose="020F0502020204030204" pitchFamily="34" charset="0"/>
+                <a:cs typeface="Calibri" panose="020F0502020204030204" pitchFamily="34" charset="0"/>
+              </a:rPr>
+              <a:t>, A., Zinn, S., </a:t>
+            </a:r>
+            <a:r>
+              <a:rPr lang="en-US" sz="1800" dirty="0" err="1">
+                <a:effectLst/>
+                <a:latin typeface="Calibri" panose="020F0502020204030204" pitchFamily="34" charset="0"/>
+                <a:ea typeface="Calibri" panose="020F0502020204030204" pitchFamily="34" charset="0"/>
+                <a:cs typeface="Calibri" panose="020F0502020204030204" pitchFamily="34" charset="0"/>
+              </a:rPr>
+              <a:t>Willekens</a:t>
+            </a:r>
+            <a:r>
+              <a:rPr lang="en-US" sz="1800" dirty="0">
+                <a:effectLst/>
+                <a:latin typeface="Calibri" panose="020F0502020204030204" pitchFamily="34" charset="0"/>
+                <a:ea typeface="Calibri" panose="020F0502020204030204" pitchFamily="34" charset="0"/>
+                <a:cs typeface="Calibri" panose="020F0502020204030204" pitchFamily="34" charset="0"/>
+              </a:rPr>
+              <a:t>, F., &amp; </a:t>
+            </a:r>
+            <a:r>
+              <a:rPr lang="en-US" sz="1800" dirty="0" err="1">
+                <a:effectLst/>
+                <a:latin typeface="Calibri" panose="020F0502020204030204" pitchFamily="34" charset="0"/>
+                <a:ea typeface="Calibri" panose="020F0502020204030204" pitchFamily="34" charset="0"/>
+                <a:cs typeface="Calibri" panose="020F0502020204030204" pitchFamily="34" charset="0"/>
+              </a:rPr>
+              <a:t>Leuchter</a:t>
+            </a:r>
+            <a:r>
+              <a:rPr lang="en-US" sz="1800" dirty="0">
+                <a:effectLst/>
+                <a:latin typeface="Calibri" panose="020F0502020204030204" pitchFamily="34" charset="0"/>
+                <a:ea typeface="Calibri" panose="020F0502020204030204" pitchFamily="34" charset="0"/>
+                <a:cs typeface="Calibri" panose="020F0502020204030204" pitchFamily="34" charset="0"/>
+              </a:rPr>
+              <a:t>, M. (2017). Multistate modelling extended by </a:t>
+            </a:r>
+            <a:r>
+              <a:rPr lang="en-US" sz="1800" dirty="0" err="1">
+                <a:effectLst/>
+                <a:latin typeface="Calibri" panose="020F0502020204030204" pitchFamily="34" charset="0"/>
+                <a:ea typeface="Calibri" panose="020F0502020204030204" pitchFamily="34" charset="0"/>
+                <a:cs typeface="Calibri" panose="020F0502020204030204" pitchFamily="34" charset="0"/>
+              </a:rPr>
+              <a:t>behavioural</a:t>
+            </a:r>
+            <a:r>
+              <a:rPr lang="en-US" sz="1800" dirty="0">
+                <a:effectLst/>
+                <a:latin typeface="Calibri" panose="020F0502020204030204" pitchFamily="34" charset="0"/>
+                <a:ea typeface="Calibri" panose="020F0502020204030204" pitchFamily="34" charset="0"/>
+                <a:cs typeface="Calibri" panose="020F0502020204030204" pitchFamily="34" charset="0"/>
+              </a:rPr>
+              <a:t> rules: An application to migration. </a:t>
+            </a:r>
+            <a:r>
+              <a:rPr lang="en-US" sz="1800" i="1" dirty="0">
+                <a:effectLst/>
+                <a:latin typeface="Calibri" panose="020F0502020204030204" pitchFamily="34" charset="0"/>
+                <a:ea typeface="Calibri" panose="020F0502020204030204" pitchFamily="34" charset="0"/>
+                <a:cs typeface="Calibri" panose="020F0502020204030204" pitchFamily="34" charset="0"/>
+              </a:rPr>
+              <a:t>Population Studies</a:t>
+            </a:r>
+            <a:r>
+              <a:rPr lang="en-US" sz="1800" dirty="0">
+                <a:effectLst/>
+                <a:latin typeface="Calibri" panose="020F0502020204030204" pitchFamily="34" charset="0"/>
+                <a:ea typeface="Calibri" panose="020F0502020204030204" pitchFamily="34" charset="0"/>
+                <a:cs typeface="Calibri" panose="020F0502020204030204" pitchFamily="34" charset="0"/>
+              </a:rPr>
+              <a:t>, </a:t>
+            </a:r>
+            <a:r>
+              <a:rPr lang="en-US" sz="1800" i="1" dirty="0">
+                <a:effectLst/>
+                <a:latin typeface="Calibri" panose="020F0502020204030204" pitchFamily="34" charset="0"/>
+                <a:ea typeface="Calibri" panose="020F0502020204030204" pitchFamily="34" charset="0"/>
+                <a:cs typeface="Calibri" panose="020F0502020204030204" pitchFamily="34" charset="0"/>
+              </a:rPr>
+              <a:t>71</a:t>
+            </a:r>
+            <a:r>
+              <a:rPr lang="en-US" sz="1800" dirty="0">
+                <a:effectLst/>
+                <a:latin typeface="Calibri" panose="020F0502020204030204" pitchFamily="34" charset="0"/>
+                <a:ea typeface="Calibri" panose="020F0502020204030204" pitchFamily="34" charset="0"/>
+                <a:cs typeface="Calibri" panose="020F0502020204030204" pitchFamily="34" charset="0"/>
+              </a:rPr>
+              <a:t>(November), 51–67. https://doi.org/10.1080/00324728.2017.1350281</a:t>
+            </a:r>
+            <a:endParaRPr lang="en-GB" sz="1800" dirty="0">
+              <a:effectLst/>
+              <a:latin typeface="Calibri" panose="020F0502020204030204" pitchFamily="34" charset="0"/>
+              <a:ea typeface="Calibri" panose="020F0502020204030204" pitchFamily="34" charset="0"/>
+              <a:cs typeface="Calibri" panose="020F0502020204030204" pitchFamily="34" charset="0"/>
+            </a:endParaRPr>
+          </a:p>
+          <a:p>
+            <a:r>
+              <a:rPr lang="en-US" sz="1800" dirty="0">
+                <a:effectLst/>
+                <a:latin typeface="Calibri" panose="020F0502020204030204" pitchFamily="34" charset="0"/>
+                <a:ea typeface="Calibri" panose="020F0502020204030204" pitchFamily="34" charset="0"/>
+                <a:cs typeface="Calibri" panose="020F0502020204030204" pitchFamily="34" charset="0"/>
+              </a:rPr>
+              <a:t>Lindstrom, D. P., &amp; López, A. (2010). Pioneers and Followers: Migrant Selectivity and the Development of U.S. Migration Streams in Latin America David. </a:t>
+            </a:r>
+            <a:r>
+              <a:rPr lang="en-US" sz="1800" i="1" dirty="0">
+                <a:effectLst/>
+                <a:latin typeface="Calibri" panose="020F0502020204030204" pitchFamily="34" charset="0"/>
+                <a:ea typeface="Calibri" panose="020F0502020204030204" pitchFamily="34" charset="0"/>
+                <a:cs typeface="Calibri" panose="020F0502020204030204" pitchFamily="34" charset="0"/>
+              </a:rPr>
+              <a:t>Annals of the American Academy of Political and Social Science</a:t>
+            </a:r>
+            <a:r>
+              <a:rPr lang="en-US" sz="1800" dirty="0">
+                <a:effectLst/>
+                <a:latin typeface="Calibri" panose="020F0502020204030204" pitchFamily="34" charset="0"/>
+                <a:ea typeface="Calibri" panose="020F0502020204030204" pitchFamily="34" charset="0"/>
+                <a:cs typeface="Calibri" panose="020F0502020204030204" pitchFamily="34" charset="0"/>
+              </a:rPr>
+              <a:t>, </a:t>
+            </a:r>
+            <a:r>
+              <a:rPr lang="en-US" sz="1800" i="1" dirty="0">
+                <a:effectLst/>
+                <a:latin typeface="Calibri" panose="020F0502020204030204" pitchFamily="34" charset="0"/>
+                <a:ea typeface="Calibri" panose="020F0502020204030204" pitchFamily="34" charset="0"/>
+                <a:cs typeface="Calibri" panose="020F0502020204030204" pitchFamily="34" charset="0"/>
+              </a:rPr>
+              <a:t>630</a:t>
+            </a:r>
+            <a:r>
+              <a:rPr lang="en-US" sz="1800" dirty="0">
+                <a:effectLst/>
+                <a:latin typeface="Calibri" panose="020F0502020204030204" pitchFamily="34" charset="0"/>
+                <a:ea typeface="Calibri" panose="020F0502020204030204" pitchFamily="34" charset="0"/>
+                <a:cs typeface="Calibri" panose="020F0502020204030204" pitchFamily="34" charset="0"/>
+              </a:rPr>
+              <a:t>(1), 53–77. https://doi.org/10.1177/0002716210368103.Pioneers</a:t>
+            </a:r>
+            <a:endParaRPr lang="en-GB" sz="1800" dirty="0">
+              <a:effectLst/>
+              <a:latin typeface="Calibri" panose="020F0502020204030204" pitchFamily="34" charset="0"/>
+              <a:ea typeface="Calibri" panose="020F0502020204030204" pitchFamily="34" charset="0"/>
+              <a:cs typeface="Calibri" panose="020F0502020204030204" pitchFamily="34" charset="0"/>
+            </a:endParaRPr>
+          </a:p>
+          <a:p>
+            <a:r>
+              <a:rPr lang="en-GB" sz="1800" dirty="0" err="1">
+                <a:latin typeface="Calibri" panose="020F0502020204030204" pitchFamily="34" charset="0"/>
+                <a:cs typeface="Calibri" panose="020F0502020204030204" pitchFamily="34" charset="0"/>
+              </a:rPr>
+              <a:t>Sanliturk</a:t>
+            </a:r>
+            <a:r>
+              <a:rPr lang="en-GB" sz="1800" dirty="0">
+                <a:latin typeface="Calibri" panose="020F0502020204030204" pitchFamily="34" charset="0"/>
+                <a:cs typeface="Calibri" panose="020F0502020204030204" pitchFamily="34" charset="0"/>
+              </a:rPr>
+              <a:t>, E., </a:t>
+            </a:r>
+            <a:r>
+              <a:rPr lang="en-GB" sz="1800" dirty="0" err="1">
+                <a:latin typeface="Calibri" panose="020F0502020204030204" pitchFamily="34" charset="0"/>
+                <a:cs typeface="Calibri" panose="020F0502020204030204" pitchFamily="34" charset="0"/>
+              </a:rPr>
+              <a:t>Zagheni</a:t>
+            </a:r>
+            <a:r>
+              <a:rPr lang="en-GB" sz="1800" dirty="0">
+                <a:latin typeface="Calibri" panose="020F0502020204030204" pitchFamily="34" charset="0"/>
+                <a:cs typeface="Calibri" panose="020F0502020204030204" pitchFamily="34" charset="0"/>
+              </a:rPr>
+              <a:t>, E., Da, M. J., </a:t>
+            </a:r>
+            <a:r>
+              <a:rPr lang="en-GB" sz="1800" dirty="0" err="1">
+                <a:latin typeface="Calibri" panose="020F0502020204030204" pitchFamily="34" charset="0"/>
+                <a:cs typeface="Calibri" panose="020F0502020204030204" pitchFamily="34" charset="0"/>
+              </a:rPr>
+              <a:t>Theile</a:t>
+            </a:r>
+            <a:r>
+              <a:rPr lang="en-GB" sz="1800" dirty="0">
+                <a:latin typeface="Calibri" panose="020F0502020204030204" pitchFamily="34" charset="0"/>
+                <a:cs typeface="Calibri" panose="020F0502020204030204" pitchFamily="34" charset="0"/>
+              </a:rPr>
+              <a:t>, T., </a:t>
+            </a:r>
+            <a:r>
+              <a:rPr lang="en-GB" sz="1800" dirty="0" err="1">
+                <a:latin typeface="Calibri" panose="020F0502020204030204" pitchFamily="34" charset="0"/>
+                <a:cs typeface="Calibri" panose="020F0502020204030204" pitchFamily="34" charset="0"/>
+              </a:rPr>
+              <a:t>Akbaritabar</a:t>
+            </a:r>
+            <a:r>
+              <a:rPr lang="en-GB" sz="1800" dirty="0">
+                <a:latin typeface="Calibri" panose="020F0502020204030204" pitchFamily="34" charset="0"/>
+                <a:cs typeface="Calibri" panose="020F0502020204030204" pitchFamily="34" charset="0"/>
+              </a:rPr>
+              <a:t>, A., Edited by Ronald Lee, I., &amp; contributions, A. (2023). Global patterns of migration of scholars with economic development. 120, 2217937120. https://doi.org/10.1073/pnas</a:t>
+            </a:r>
+          </a:p>
+          <a:p>
+            <a:r>
+              <a:rPr lang="en-US" sz="1800" dirty="0">
+                <a:effectLst/>
+                <a:latin typeface="Calibri" panose="020F0502020204030204" pitchFamily="34" charset="0"/>
+                <a:ea typeface="Calibri" panose="020F0502020204030204" pitchFamily="34" charset="0"/>
+                <a:cs typeface="Calibri" panose="020F0502020204030204" pitchFamily="34" charset="0"/>
+              </a:rPr>
+              <a:t>Silva, A. C., &amp; Massey, D. S. (2014). Violence, Networks, and International Migration from Colombia. </a:t>
+            </a:r>
+            <a:r>
+              <a:rPr lang="en-US" sz="1800" i="1" dirty="0">
+                <a:effectLst/>
+                <a:latin typeface="Calibri" panose="020F0502020204030204" pitchFamily="34" charset="0"/>
+                <a:ea typeface="Calibri" panose="020F0502020204030204" pitchFamily="34" charset="0"/>
+                <a:cs typeface="Calibri" panose="020F0502020204030204" pitchFamily="34" charset="0"/>
+              </a:rPr>
+              <a:t>International Migration</a:t>
+            </a:r>
+            <a:r>
+              <a:rPr lang="en-US" sz="1800" dirty="0">
+                <a:effectLst/>
+                <a:latin typeface="Calibri" panose="020F0502020204030204" pitchFamily="34" charset="0"/>
+                <a:ea typeface="Calibri" panose="020F0502020204030204" pitchFamily="34" charset="0"/>
+                <a:cs typeface="Calibri" panose="020F0502020204030204" pitchFamily="34" charset="0"/>
+              </a:rPr>
+              <a:t>, </a:t>
+            </a:r>
+            <a:r>
+              <a:rPr lang="en-US" sz="1800" i="1" dirty="0">
+                <a:effectLst/>
+                <a:latin typeface="Calibri" panose="020F0502020204030204" pitchFamily="34" charset="0"/>
+                <a:ea typeface="Calibri" panose="020F0502020204030204" pitchFamily="34" charset="0"/>
+                <a:cs typeface="Calibri" panose="020F0502020204030204" pitchFamily="34" charset="0"/>
+              </a:rPr>
+              <a:t>53</a:t>
+            </a:r>
+            <a:r>
+              <a:rPr lang="en-US" sz="1800" dirty="0">
+                <a:effectLst/>
+                <a:latin typeface="Calibri" panose="020F0502020204030204" pitchFamily="34" charset="0"/>
+                <a:ea typeface="Calibri" panose="020F0502020204030204" pitchFamily="34" charset="0"/>
+                <a:cs typeface="Calibri" panose="020F0502020204030204" pitchFamily="34" charset="0"/>
+              </a:rPr>
+              <a:t>(5), 162–178. https://doi.org/10.1111/imig.12169</a:t>
+            </a:r>
+            <a:endParaRPr lang="en-GB" sz="1800" dirty="0">
+              <a:effectLst/>
+              <a:latin typeface="Calibri" panose="020F0502020204030204" pitchFamily="34" charset="0"/>
+              <a:ea typeface="Calibri" panose="020F0502020204030204" pitchFamily="34" charset="0"/>
+              <a:cs typeface="Calibri" panose="020F0502020204030204" pitchFamily="34" charset="0"/>
+            </a:endParaRPr>
+          </a:p>
+          <a:p>
+            <a:r>
+              <a:rPr lang="en-US" sz="1800" dirty="0" err="1">
+                <a:effectLst/>
+                <a:latin typeface="Calibri" panose="020F0502020204030204" pitchFamily="34" charset="0"/>
+                <a:ea typeface="Calibri" panose="020F0502020204030204" pitchFamily="34" charset="0"/>
+                <a:cs typeface="Calibri" panose="020F0502020204030204" pitchFamily="34" charset="0"/>
+              </a:rPr>
+              <a:t>Willekens</a:t>
+            </a:r>
+            <a:r>
+              <a:rPr lang="en-US" sz="1800" dirty="0">
+                <a:effectLst/>
+                <a:latin typeface="Calibri" panose="020F0502020204030204" pitchFamily="34" charset="0"/>
+                <a:ea typeface="Calibri" panose="020F0502020204030204" pitchFamily="34" charset="0"/>
+                <a:cs typeface="Calibri" panose="020F0502020204030204" pitchFamily="34" charset="0"/>
+              </a:rPr>
+              <a:t>, F. (2017). </a:t>
+            </a:r>
+            <a:r>
+              <a:rPr lang="en-US" sz="1800" i="1" dirty="0">
+                <a:effectLst/>
+                <a:latin typeface="Calibri" panose="020F0502020204030204" pitchFamily="34" charset="0"/>
+                <a:ea typeface="Calibri" panose="020F0502020204030204" pitchFamily="34" charset="0"/>
+                <a:cs typeface="Calibri" panose="020F0502020204030204" pitchFamily="34" charset="0"/>
+              </a:rPr>
+              <a:t>The Decision to Emigrate: A Simulation Model</a:t>
+            </a:r>
+            <a:r>
+              <a:rPr lang="en-US" sz="1800" dirty="0">
+                <a:effectLst/>
+                <a:latin typeface="Calibri" panose="020F0502020204030204" pitchFamily="34" charset="0"/>
+                <a:ea typeface="Calibri" panose="020F0502020204030204" pitchFamily="34" charset="0"/>
+                <a:cs typeface="Calibri" panose="020F0502020204030204" pitchFamily="34" charset="0"/>
+              </a:rPr>
+              <a:t>. </a:t>
+            </a:r>
+            <a:r>
+              <a:rPr lang="en-US" sz="1800" i="1" dirty="0">
+                <a:effectLst/>
+                <a:latin typeface="Calibri" panose="020F0502020204030204" pitchFamily="34" charset="0"/>
+                <a:ea typeface="Calibri" panose="020F0502020204030204" pitchFamily="34" charset="0"/>
+                <a:cs typeface="Calibri" panose="020F0502020204030204" pitchFamily="34" charset="0"/>
+              </a:rPr>
+              <a:t>Agent-Based Modelling in Population Studies</a:t>
+            </a:r>
+            <a:r>
+              <a:rPr lang="en-US" sz="1800" dirty="0">
+                <a:effectLst/>
+                <a:latin typeface="Calibri" panose="020F0502020204030204" pitchFamily="34" charset="0"/>
+                <a:ea typeface="Calibri" panose="020F0502020204030204" pitchFamily="34" charset="0"/>
+                <a:cs typeface="Calibri" panose="020F0502020204030204" pitchFamily="34" charset="0"/>
+              </a:rPr>
+              <a:t>. </a:t>
+            </a:r>
+            <a:r>
+              <a:rPr lang="en-US" sz="1800" dirty="0">
+                <a:effectLst/>
+                <a:latin typeface="Calibri" panose="020F0502020204030204" pitchFamily="34" charset="0"/>
+                <a:ea typeface="Calibri" panose="020F0502020204030204" pitchFamily="34" charset="0"/>
+                <a:cs typeface="Calibri" panose="020F0502020204030204" pitchFamily="34" charset="0"/>
+                <a:hlinkClick r:id="rId5"/>
+              </a:rPr>
+              <a:t>https://doi.org/10.1007/978-3-319-32283-4</a:t>
+            </a:r>
+            <a:endParaRPr lang="en-US" sz="1800" dirty="0">
+              <a:effectLst/>
+              <a:latin typeface="Calibri" panose="020F0502020204030204" pitchFamily="34" charset="0"/>
+              <a:ea typeface="Calibri" panose="020F0502020204030204" pitchFamily="34" charset="0"/>
+              <a:cs typeface="Calibri" panose="020F0502020204030204" pitchFamily="34" charset="0"/>
+            </a:endParaRPr>
+          </a:p>
+          <a:p>
+            <a:r>
+              <a:rPr lang="en-US" sz="1800" dirty="0">
+                <a:effectLst/>
+                <a:latin typeface="Calibri" panose="020F0502020204030204" pitchFamily="34" charset="0"/>
+                <a:ea typeface="Calibri" panose="020F0502020204030204" pitchFamily="34" charset="0"/>
+                <a:cs typeface="Calibri" panose="020F0502020204030204" pitchFamily="34" charset="0"/>
+              </a:rPr>
+              <a:t>Williams, N., O’Brien, M., &amp; Yao, X. (2017). Using Survey Data for Agent-Based Modeling: Design and Challenges in a Model of Armed Conflict and Population Change. In Andree Grow &amp; J. Van </a:t>
+            </a:r>
+            <a:r>
+              <a:rPr lang="en-US" sz="1800" dirty="0" err="1">
+                <a:effectLst/>
+                <a:latin typeface="Calibri" panose="020F0502020204030204" pitchFamily="34" charset="0"/>
+                <a:ea typeface="Calibri" panose="020F0502020204030204" pitchFamily="34" charset="0"/>
+                <a:cs typeface="Calibri" panose="020F0502020204030204" pitchFamily="34" charset="0"/>
+              </a:rPr>
+              <a:t>Bavel</a:t>
+            </a:r>
+            <a:r>
+              <a:rPr lang="en-US" sz="1800" dirty="0">
+                <a:effectLst/>
+                <a:latin typeface="Calibri" panose="020F0502020204030204" pitchFamily="34" charset="0"/>
+                <a:ea typeface="Calibri" panose="020F0502020204030204" pitchFamily="34" charset="0"/>
+                <a:cs typeface="Calibri" panose="020F0502020204030204" pitchFamily="34" charset="0"/>
+              </a:rPr>
+              <a:t> (Eds.), </a:t>
+            </a:r>
+            <a:r>
+              <a:rPr lang="en-US" sz="1800" i="1" dirty="0">
+                <a:effectLst/>
+                <a:latin typeface="Calibri" panose="020F0502020204030204" pitchFamily="34" charset="0"/>
+                <a:ea typeface="Calibri" panose="020F0502020204030204" pitchFamily="34" charset="0"/>
+                <a:cs typeface="Calibri" panose="020F0502020204030204" pitchFamily="34" charset="0"/>
+              </a:rPr>
+              <a:t>Agent-Based Modelling in Population Studies</a:t>
+            </a:r>
+            <a:r>
+              <a:rPr lang="en-US" sz="1800" dirty="0">
+                <a:effectLst/>
+                <a:latin typeface="Calibri" panose="020F0502020204030204" pitchFamily="34" charset="0"/>
+                <a:ea typeface="Calibri" panose="020F0502020204030204" pitchFamily="34" charset="0"/>
+                <a:cs typeface="Calibri" panose="020F0502020204030204" pitchFamily="34" charset="0"/>
+              </a:rPr>
+              <a:t> (pp. 159–184). Springer. https://doi.org/10.1007/978-3-319-32283-4_6</a:t>
+            </a:r>
+            <a:endParaRPr lang="en-GB" sz="1800" dirty="0">
+              <a:effectLst/>
+              <a:latin typeface="Calibri" panose="020F0502020204030204" pitchFamily="34" charset="0"/>
+              <a:ea typeface="Calibri" panose="020F0502020204030204" pitchFamily="34" charset="0"/>
+              <a:cs typeface="Calibri" panose="020F0502020204030204" pitchFamily="34" charset="0"/>
+            </a:endParaRPr>
+          </a:p>
+          <a:p>
+            <a:r>
+              <a:rPr lang="en-US" sz="1800" dirty="0" err="1">
+                <a:effectLst/>
+                <a:latin typeface="Calibri" panose="020F0502020204030204" pitchFamily="34" charset="0"/>
+                <a:ea typeface="Calibri" panose="020F0502020204030204" pitchFamily="34" charset="0"/>
+                <a:cs typeface="Calibri" panose="020F0502020204030204" pitchFamily="34" charset="0"/>
+              </a:rPr>
+              <a:t>Zagheni</a:t>
+            </a:r>
+            <a:r>
+              <a:rPr lang="en-US" sz="1800" dirty="0">
+                <a:effectLst/>
+                <a:latin typeface="Calibri" panose="020F0502020204030204" pitchFamily="34" charset="0"/>
+                <a:ea typeface="Calibri" panose="020F0502020204030204" pitchFamily="34" charset="0"/>
+                <a:cs typeface="Calibri" panose="020F0502020204030204" pitchFamily="34" charset="0"/>
+              </a:rPr>
+              <a:t>, E. (2015). Microsimulation in Demographic Research. In J. D. Wright (Ed.), </a:t>
+            </a:r>
+            <a:r>
+              <a:rPr lang="en-US" sz="1800" i="1" dirty="0">
+                <a:effectLst/>
+                <a:latin typeface="Calibri" panose="020F0502020204030204" pitchFamily="34" charset="0"/>
+                <a:ea typeface="Calibri" panose="020F0502020204030204" pitchFamily="34" charset="0"/>
+                <a:cs typeface="Calibri" panose="020F0502020204030204" pitchFamily="34" charset="0"/>
+              </a:rPr>
+              <a:t>International Encyclopedia of the Social &amp; Behavioral Sciences</a:t>
+            </a:r>
+            <a:r>
+              <a:rPr lang="en-US" sz="1800" dirty="0">
+                <a:effectLst/>
+                <a:latin typeface="Calibri" panose="020F0502020204030204" pitchFamily="34" charset="0"/>
+                <a:ea typeface="Calibri" panose="020F0502020204030204" pitchFamily="34" charset="0"/>
+                <a:cs typeface="Calibri" panose="020F0502020204030204" pitchFamily="34" charset="0"/>
+              </a:rPr>
+              <a:t>. https://doi.org/10.1016/b0-08-043076-7/02115-x</a:t>
+            </a:r>
+            <a:endParaRPr lang="en-GB" sz="1800" dirty="0">
+              <a:effectLst/>
+              <a:latin typeface="Calibri" panose="020F0502020204030204" pitchFamily="34" charset="0"/>
+              <a:ea typeface="Calibri" panose="020F0502020204030204" pitchFamily="34" charset="0"/>
+              <a:cs typeface="Calibri" panose="020F0502020204030204" pitchFamily="34" charset="0"/>
+            </a:endParaRPr>
+          </a:p>
+          <a:p>
+            <a:endParaRPr lang="en-GB" sz="1800" dirty="0">
+              <a:effectLst/>
+              <a:latin typeface="Calibri" panose="020F0502020204030204" pitchFamily="34" charset="0"/>
+              <a:ea typeface="Calibri" panose="020F0502020204030204" pitchFamily="34" charset="0"/>
+              <a:cs typeface="Calibri" panose="020F0502020204030204" pitchFamily="34" charset="0"/>
+            </a:endParaRPr>
+          </a:p>
+          <a:p>
+            <a:endParaRPr lang="en-GB" dirty="0"/>
           </a:p>
         </p:txBody>
       </p:sp>
     </p:spTree>
     <p:extLst>
       <p:ext uri="{BB962C8B-B14F-4D97-AF65-F5344CB8AC3E}">
-        <p14:creationId xmlns:p14="http://schemas.microsoft.com/office/powerpoint/2010/main" val="187701626"/>
+        <p14:creationId xmlns:p14="http://schemas.microsoft.com/office/powerpoint/2010/main" val="2011959159"/>
       </p:ext>
     </p:extLst>
   </p:cSld>
@@ -6373,7 +6708,7 @@
           <p:cNvPr id="2" name="Title 1">
             <a:extLst>
               <a:ext uri="{FF2B5EF4-FFF2-40B4-BE49-F238E27FC236}">
-                <a16:creationId xmlns:a16="http://schemas.microsoft.com/office/drawing/2014/main" id="{AE16F414-813E-86B6-52C9-F2AE5CFDE099}"/>
+                <a16:creationId xmlns:a16="http://schemas.microsoft.com/office/drawing/2014/main" id="{0723D4C3-2771-2ECA-3A40-9AE014D8725C}"/>
               </a:ext>
             </a:extLst>
           </p:cNvPr>
@@ -6391,492 +6726,15 @@
           <a:p>
             <a:r>
               <a:rPr lang="es-ES" dirty="0" err="1"/>
-              <a:t>References</a:t>
-            </a:r>
-            <a:endParaRPr lang="en-GB" dirty="0"/>
-          </a:p>
-        </p:txBody>
-      </p:sp>
-      <p:sp>
-        <p:nvSpPr>
-          <p:cNvPr id="3" name="Content Placeholder 2">
-            <a:extLst>
-              <a:ext uri="{FF2B5EF4-FFF2-40B4-BE49-F238E27FC236}">
-                <a16:creationId xmlns:a16="http://schemas.microsoft.com/office/drawing/2014/main" id="{C6E41935-3B33-AC41-5897-84956CCD9CF7}"/>
-              </a:ext>
-            </a:extLst>
-          </p:cNvPr>
-          <p:cNvSpPr>
-            <a:spLocks noGrp="1"/>
-          </p:cNvSpPr>
-          <p:nvPr>
-            <p:ph idx="1"/>
-          </p:nvPr>
-        </p:nvSpPr>
-        <p:spPr/>
-        <p:txBody>
-          <a:bodyPr>
-            <a:normAutofit fontScale="92500" lnSpcReduction="20000"/>
-          </a:bodyPr>
-          <a:lstStyle/>
-          <a:p>
-            <a:r>
-              <a:rPr lang="en-US" sz="1800" dirty="0" err="1">
-                <a:effectLst/>
-                <a:latin typeface="Calibri" panose="020F0502020204030204" pitchFamily="34" charset="0"/>
-                <a:ea typeface="Calibri" panose="020F0502020204030204" pitchFamily="34" charset="0"/>
-                <a:cs typeface="Calibri" panose="020F0502020204030204" pitchFamily="34" charset="0"/>
-              </a:rPr>
-              <a:t>Klabunde</a:t>
-            </a:r>
-            <a:r>
-              <a:rPr lang="en-US" sz="1800" dirty="0">
-                <a:effectLst/>
-                <a:latin typeface="Calibri" panose="020F0502020204030204" pitchFamily="34" charset="0"/>
-                <a:ea typeface="Calibri" panose="020F0502020204030204" pitchFamily="34" charset="0"/>
-                <a:cs typeface="Calibri" panose="020F0502020204030204" pitchFamily="34" charset="0"/>
-              </a:rPr>
-              <a:t>, A., Zinn, S., </a:t>
-            </a:r>
-            <a:r>
-              <a:rPr lang="en-US" sz="1800" dirty="0" err="1">
-                <a:effectLst/>
-                <a:latin typeface="Calibri" panose="020F0502020204030204" pitchFamily="34" charset="0"/>
-                <a:ea typeface="Calibri" panose="020F0502020204030204" pitchFamily="34" charset="0"/>
-                <a:cs typeface="Calibri" panose="020F0502020204030204" pitchFamily="34" charset="0"/>
-              </a:rPr>
-              <a:t>Willekens</a:t>
-            </a:r>
-            <a:r>
-              <a:rPr lang="en-US" sz="1800" dirty="0">
-                <a:effectLst/>
-                <a:latin typeface="Calibri" panose="020F0502020204030204" pitchFamily="34" charset="0"/>
-                <a:ea typeface="Calibri" panose="020F0502020204030204" pitchFamily="34" charset="0"/>
-                <a:cs typeface="Calibri" panose="020F0502020204030204" pitchFamily="34" charset="0"/>
-              </a:rPr>
-              <a:t>, F., &amp; </a:t>
-            </a:r>
-            <a:r>
-              <a:rPr lang="en-US" sz="1800" dirty="0" err="1">
-                <a:effectLst/>
-                <a:latin typeface="Calibri" panose="020F0502020204030204" pitchFamily="34" charset="0"/>
-                <a:ea typeface="Calibri" panose="020F0502020204030204" pitchFamily="34" charset="0"/>
-                <a:cs typeface="Calibri" panose="020F0502020204030204" pitchFamily="34" charset="0"/>
-              </a:rPr>
-              <a:t>Leuchter</a:t>
-            </a:r>
-            <a:r>
-              <a:rPr lang="en-US" sz="1800" dirty="0">
-                <a:effectLst/>
-                <a:latin typeface="Calibri" panose="020F0502020204030204" pitchFamily="34" charset="0"/>
-                <a:ea typeface="Calibri" panose="020F0502020204030204" pitchFamily="34" charset="0"/>
-                <a:cs typeface="Calibri" panose="020F0502020204030204" pitchFamily="34" charset="0"/>
-              </a:rPr>
-              <a:t>, M. (2017). Multistate modelling extended by </a:t>
-            </a:r>
-            <a:r>
-              <a:rPr lang="en-US" sz="1800" dirty="0" err="1">
-                <a:effectLst/>
-                <a:latin typeface="Calibri" panose="020F0502020204030204" pitchFamily="34" charset="0"/>
-                <a:ea typeface="Calibri" panose="020F0502020204030204" pitchFamily="34" charset="0"/>
-                <a:cs typeface="Calibri" panose="020F0502020204030204" pitchFamily="34" charset="0"/>
-              </a:rPr>
-              <a:t>behavioural</a:t>
-            </a:r>
-            <a:r>
-              <a:rPr lang="en-US" sz="1800" dirty="0">
-                <a:effectLst/>
-                <a:latin typeface="Calibri" panose="020F0502020204030204" pitchFamily="34" charset="0"/>
-                <a:ea typeface="Calibri" panose="020F0502020204030204" pitchFamily="34" charset="0"/>
-                <a:cs typeface="Calibri" panose="020F0502020204030204" pitchFamily="34" charset="0"/>
-              </a:rPr>
-              <a:t> rules: An application to migration. </a:t>
-            </a:r>
-            <a:r>
-              <a:rPr lang="en-US" sz="1800" i="1" dirty="0">
-                <a:effectLst/>
-                <a:latin typeface="Calibri" panose="020F0502020204030204" pitchFamily="34" charset="0"/>
-                <a:ea typeface="Calibri" panose="020F0502020204030204" pitchFamily="34" charset="0"/>
-                <a:cs typeface="Calibri" panose="020F0502020204030204" pitchFamily="34" charset="0"/>
-              </a:rPr>
-              <a:t>Population Studies</a:t>
-            </a:r>
-            <a:r>
-              <a:rPr lang="en-US" sz="1800" dirty="0">
-                <a:effectLst/>
-                <a:latin typeface="Calibri" panose="020F0502020204030204" pitchFamily="34" charset="0"/>
-                <a:ea typeface="Calibri" panose="020F0502020204030204" pitchFamily="34" charset="0"/>
-                <a:cs typeface="Calibri" panose="020F0502020204030204" pitchFamily="34" charset="0"/>
-              </a:rPr>
-              <a:t>, </a:t>
-            </a:r>
-            <a:r>
-              <a:rPr lang="en-US" sz="1800" i="1" dirty="0">
-                <a:effectLst/>
-                <a:latin typeface="Calibri" panose="020F0502020204030204" pitchFamily="34" charset="0"/>
-                <a:ea typeface="Calibri" panose="020F0502020204030204" pitchFamily="34" charset="0"/>
-                <a:cs typeface="Calibri" panose="020F0502020204030204" pitchFamily="34" charset="0"/>
-              </a:rPr>
-              <a:t>71</a:t>
-            </a:r>
-            <a:r>
-              <a:rPr lang="en-US" sz="1800" dirty="0">
-                <a:effectLst/>
-                <a:latin typeface="Calibri" panose="020F0502020204030204" pitchFamily="34" charset="0"/>
-                <a:ea typeface="Calibri" panose="020F0502020204030204" pitchFamily="34" charset="0"/>
-                <a:cs typeface="Calibri" panose="020F0502020204030204" pitchFamily="34" charset="0"/>
-              </a:rPr>
-              <a:t>(November), 51–67. https://doi.org/10.1080/00324728.2017.1350281</a:t>
-            </a:r>
-            <a:endParaRPr lang="en-GB" sz="1800" dirty="0">
-              <a:effectLst/>
-              <a:latin typeface="Calibri" panose="020F0502020204030204" pitchFamily="34" charset="0"/>
-              <a:ea typeface="Calibri" panose="020F0502020204030204" pitchFamily="34" charset="0"/>
-              <a:cs typeface="Calibri" panose="020F0502020204030204" pitchFamily="34" charset="0"/>
-            </a:endParaRPr>
-          </a:p>
-          <a:p>
-            <a:r>
-              <a:rPr lang="en-US" sz="1800" dirty="0">
-                <a:effectLst/>
-                <a:latin typeface="Calibri" panose="020F0502020204030204" pitchFamily="34" charset="0"/>
-                <a:ea typeface="Calibri" panose="020F0502020204030204" pitchFamily="34" charset="0"/>
-                <a:cs typeface="Calibri" panose="020F0502020204030204" pitchFamily="34" charset="0"/>
-              </a:rPr>
-              <a:t>Lindstrom, D. P., &amp; López, A. (2010). Pioneers and Followers: Migrant Selectivity and the Development of U.S. Migration Streams in Latin America David. </a:t>
-            </a:r>
-            <a:r>
-              <a:rPr lang="en-US" sz="1800" i="1" dirty="0">
-                <a:effectLst/>
-                <a:latin typeface="Calibri" panose="020F0502020204030204" pitchFamily="34" charset="0"/>
-                <a:ea typeface="Calibri" panose="020F0502020204030204" pitchFamily="34" charset="0"/>
-                <a:cs typeface="Calibri" panose="020F0502020204030204" pitchFamily="34" charset="0"/>
-              </a:rPr>
-              <a:t>Annals of the American Academy of Political and Social Science</a:t>
-            </a:r>
-            <a:r>
-              <a:rPr lang="en-US" sz="1800" dirty="0">
-                <a:effectLst/>
-                <a:latin typeface="Calibri" panose="020F0502020204030204" pitchFamily="34" charset="0"/>
-                <a:ea typeface="Calibri" panose="020F0502020204030204" pitchFamily="34" charset="0"/>
-                <a:cs typeface="Calibri" panose="020F0502020204030204" pitchFamily="34" charset="0"/>
-              </a:rPr>
-              <a:t>, </a:t>
-            </a:r>
-            <a:r>
-              <a:rPr lang="en-US" sz="1800" i="1" dirty="0">
-                <a:effectLst/>
-                <a:latin typeface="Calibri" panose="020F0502020204030204" pitchFamily="34" charset="0"/>
-                <a:ea typeface="Calibri" panose="020F0502020204030204" pitchFamily="34" charset="0"/>
-                <a:cs typeface="Calibri" panose="020F0502020204030204" pitchFamily="34" charset="0"/>
-              </a:rPr>
-              <a:t>630</a:t>
-            </a:r>
-            <a:r>
-              <a:rPr lang="en-US" sz="1800" dirty="0">
-                <a:effectLst/>
-                <a:latin typeface="Calibri" panose="020F0502020204030204" pitchFamily="34" charset="0"/>
-                <a:ea typeface="Calibri" panose="020F0502020204030204" pitchFamily="34" charset="0"/>
-                <a:cs typeface="Calibri" panose="020F0502020204030204" pitchFamily="34" charset="0"/>
-              </a:rPr>
-              <a:t>(1), 53–77. https://doi.org/10.1177/0002716210368103.Pioneers</a:t>
-            </a:r>
-            <a:endParaRPr lang="en-GB" sz="1800" dirty="0">
-              <a:effectLst/>
-              <a:latin typeface="Calibri" panose="020F0502020204030204" pitchFamily="34" charset="0"/>
-              <a:ea typeface="Calibri" panose="020F0502020204030204" pitchFamily="34" charset="0"/>
-              <a:cs typeface="Calibri" panose="020F0502020204030204" pitchFamily="34" charset="0"/>
-            </a:endParaRPr>
-          </a:p>
-          <a:p>
-            <a:r>
-              <a:rPr lang="en-GB" sz="1800" dirty="0" err="1">
-                <a:latin typeface="Calibri" panose="020F0502020204030204" pitchFamily="34" charset="0"/>
-                <a:cs typeface="Calibri" panose="020F0502020204030204" pitchFamily="34" charset="0"/>
-              </a:rPr>
-              <a:t>Sanliturk</a:t>
-            </a:r>
-            <a:r>
-              <a:rPr lang="en-GB" sz="1800" dirty="0">
-                <a:latin typeface="Calibri" panose="020F0502020204030204" pitchFamily="34" charset="0"/>
-                <a:cs typeface="Calibri" panose="020F0502020204030204" pitchFamily="34" charset="0"/>
-              </a:rPr>
-              <a:t>, E., </a:t>
-            </a:r>
-            <a:r>
-              <a:rPr lang="en-GB" sz="1800" dirty="0" err="1">
-                <a:latin typeface="Calibri" panose="020F0502020204030204" pitchFamily="34" charset="0"/>
-                <a:cs typeface="Calibri" panose="020F0502020204030204" pitchFamily="34" charset="0"/>
-              </a:rPr>
-              <a:t>Zagheni</a:t>
-            </a:r>
-            <a:r>
-              <a:rPr lang="en-GB" sz="1800" dirty="0">
-                <a:latin typeface="Calibri" panose="020F0502020204030204" pitchFamily="34" charset="0"/>
-                <a:cs typeface="Calibri" panose="020F0502020204030204" pitchFamily="34" charset="0"/>
-              </a:rPr>
-              <a:t>, E., Da, M. J., </a:t>
-            </a:r>
-            <a:r>
-              <a:rPr lang="en-GB" sz="1800" dirty="0" err="1">
-                <a:latin typeface="Calibri" panose="020F0502020204030204" pitchFamily="34" charset="0"/>
-                <a:cs typeface="Calibri" panose="020F0502020204030204" pitchFamily="34" charset="0"/>
-              </a:rPr>
-              <a:t>Theile</a:t>
-            </a:r>
-            <a:r>
-              <a:rPr lang="en-GB" sz="1800" dirty="0">
-                <a:latin typeface="Calibri" panose="020F0502020204030204" pitchFamily="34" charset="0"/>
-                <a:cs typeface="Calibri" panose="020F0502020204030204" pitchFamily="34" charset="0"/>
-              </a:rPr>
-              <a:t>, T., </a:t>
-            </a:r>
-            <a:r>
-              <a:rPr lang="en-GB" sz="1800" dirty="0" err="1">
-                <a:latin typeface="Calibri" panose="020F0502020204030204" pitchFamily="34" charset="0"/>
-                <a:cs typeface="Calibri" panose="020F0502020204030204" pitchFamily="34" charset="0"/>
-              </a:rPr>
-              <a:t>Akbaritabar</a:t>
-            </a:r>
-            <a:r>
-              <a:rPr lang="en-GB" sz="1800" dirty="0">
-                <a:latin typeface="Calibri" panose="020F0502020204030204" pitchFamily="34" charset="0"/>
-                <a:cs typeface="Calibri" panose="020F0502020204030204" pitchFamily="34" charset="0"/>
-              </a:rPr>
-              <a:t>, A., Edited by Ronald Lee, I., &amp; contributions, A. (2023). Global patterns of migration of scholars with economic development. 120, 2217937120. https://doi.org/10.1073/pnas</a:t>
-            </a:r>
-          </a:p>
-          <a:p>
-            <a:r>
-              <a:rPr lang="en-US" sz="1800" dirty="0">
-                <a:effectLst/>
-                <a:latin typeface="Calibri" panose="020F0502020204030204" pitchFamily="34" charset="0"/>
-                <a:ea typeface="Calibri" panose="020F0502020204030204" pitchFamily="34" charset="0"/>
-                <a:cs typeface="Calibri" panose="020F0502020204030204" pitchFamily="34" charset="0"/>
-              </a:rPr>
-              <a:t>Silva, A. C., &amp; Massey, D. S. (2014). Violence, Networks, and International Migration from Colombia. </a:t>
-            </a:r>
-            <a:r>
-              <a:rPr lang="en-US" sz="1800" i="1" dirty="0">
-                <a:effectLst/>
-                <a:latin typeface="Calibri" panose="020F0502020204030204" pitchFamily="34" charset="0"/>
-                <a:ea typeface="Calibri" panose="020F0502020204030204" pitchFamily="34" charset="0"/>
-                <a:cs typeface="Calibri" panose="020F0502020204030204" pitchFamily="34" charset="0"/>
-              </a:rPr>
-              <a:t>International Migration</a:t>
-            </a:r>
-            <a:r>
-              <a:rPr lang="en-US" sz="1800" dirty="0">
-                <a:effectLst/>
-                <a:latin typeface="Calibri" panose="020F0502020204030204" pitchFamily="34" charset="0"/>
-                <a:ea typeface="Calibri" panose="020F0502020204030204" pitchFamily="34" charset="0"/>
-                <a:cs typeface="Calibri" panose="020F0502020204030204" pitchFamily="34" charset="0"/>
-              </a:rPr>
-              <a:t>, </a:t>
-            </a:r>
-            <a:r>
-              <a:rPr lang="en-US" sz="1800" i="1" dirty="0">
-                <a:effectLst/>
-                <a:latin typeface="Calibri" panose="020F0502020204030204" pitchFamily="34" charset="0"/>
-                <a:ea typeface="Calibri" panose="020F0502020204030204" pitchFamily="34" charset="0"/>
-                <a:cs typeface="Calibri" panose="020F0502020204030204" pitchFamily="34" charset="0"/>
-              </a:rPr>
-              <a:t>53</a:t>
-            </a:r>
-            <a:r>
-              <a:rPr lang="en-US" sz="1800" dirty="0">
-                <a:effectLst/>
-                <a:latin typeface="Calibri" panose="020F0502020204030204" pitchFamily="34" charset="0"/>
-                <a:ea typeface="Calibri" panose="020F0502020204030204" pitchFamily="34" charset="0"/>
-                <a:cs typeface="Calibri" panose="020F0502020204030204" pitchFamily="34" charset="0"/>
-              </a:rPr>
-              <a:t>(5), 162–178. https://doi.org/10.1111/imig.12169</a:t>
-            </a:r>
-            <a:endParaRPr lang="en-GB" sz="1800" dirty="0">
-              <a:effectLst/>
-              <a:latin typeface="Calibri" panose="020F0502020204030204" pitchFamily="34" charset="0"/>
-              <a:ea typeface="Calibri" panose="020F0502020204030204" pitchFamily="34" charset="0"/>
-              <a:cs typeface="Calibri" panose="020F0502020204030204" pitchFamily="34" charset="0"/>
-            </a:endParaRPr>
-          </a:p>
-          <a:p>
-            <a:r>
-              <a:rPr lang="en-US" sz="1800" dirty="0" err="1">
-                <a:effectLst/>
-                <a:latin typeface="Calibri" panose="020F0502020204030204" pitchFamily="34" charset="0"/>
-                <a:ea typeface="Calibri" panose="020F0502020204030204" pitchFamily="34" charset="0"/>
-                <a:cs typeface="Calibri" panose="020F0502020204030204" pitchFamily="34" charset="0"/>
-              </a:rPr>
-              <a:t>Willekens</a:t>
-            </a:r>
-            <a:r>
-              <a:rPr lang="en-US" sz="1800" dirty="0">
-                <a:effectLst/>
-                <a:latin typeface="Calibri" panose="020F0502020204030204" pitchFamily="34" charset="0"/>
-                <a:ea typeface="Calibri" panose="020F0502020204030204" pitchFamily="34" charset="0"/>
-                <a:cs typeface="Calibri" panose="020F0502020204030204" pitchFamily="34" charset="0"/>
-              </a:rPr>
-              <a:t>, F. (2017). </a:t>
-            </a:r>
-            <a:r>
-              <a:rPr lang="en-US" sz="1800" i="1" dirty="0">
-                <a:effectLst/>
-                <a:latin typeface="Calibri" panose="020F0502020204030204" pitchFamily="34" charset="0"/>
-                <a:ea typeface="Calibri" panose="020F0502020204030204" pitchFamily="34" charset="0"/>
-                <a:cs typeface="Calibri" panose="020F0502020204030204" pitchFamily="34" charset="0"/>
-              </a:rPr>
-              <a:t>The Decision to Emigrate: A Simulation Model</a:t>
-            </a:r>
-            <a:r>
-              <a:rPr lang="en-US" sz="1800" dirty="0">
-                <a:effectLst/>
-                <a:latin typeface="Calibri" panose="020F0502020204030204" pitchFamily="34" charset="0"/>
-                <a:ea typeface="Calibri" panose="020F0502020204030204" pitchFamily="34" charset="0"/>
-                <a:cs typeface="Calibri" panose="020F0502020204030204" pitchFamily="34" charset="0"/>
-              </a:rPr>
-              <a:t>. </a:t>
-            </a:r>
-            <a:r>
-              <a:rPr lang="en-US" sz="1800" i="1" dirty="0">
-                <a:effectLst/>
-                <a:latin typeface="Calibri" panose="020F0502020204030204" pitchFamily="34" charset="0"/>
-                <a:ea typeface="Calibri" panose="020F0502020204030204" pitchFamily="34" charset="0"/>
-                <a:cs typeface="Calibri" panose="020F0502020204030204" pitchFamily="34" charset="0"/>
-              </a:rPr>
-              <a:t>Agent-Based Modelling in Population Studies</a:t>
-            </a:r>
-            <a:r>
-              <a:rPr lang="en-US" sz="1800" dirty="0">
-                <a:effectLst/>
-                <a:latin typeface="Calibri" panose="020F0502020204030204" pitchFamily="34" charset="0"/>
-                <a:ea typeface="Calibri" panose="020F0502020204030204" pitchFamily="34" charset="0"/>
-                <a:cs typeface="Calibri" panose="020F0502020204030204" pitchFamily="34" charset="0"/>
-              </a:rPr>
-              <a:t>. </a:t>
-            </a:r>
-            <a:r>
-              <a:rPr lang="en-US" sz="1800" dirty="0">
-                <a:effectLst/>
-                <a:latin typeface="Calibri" panose="020F0502020204030204" pitchFamily="34" charset="0"/>
-                <a:ea typeface="Calibri" panose="020F0502020204030204" pitchFamily="34" charset="0"/>
-                <a:cs typeface="Calibri" panose="020F0502020204030204" pitchFamily="34" charset="0"/>
-                <a:hlinkClick r:id="rId2"/>
-              </a:rPr>
-              <a:t>https://doi.org/10.1007/978-3-319-32283-4</a:t>
-            </a:r>
-            <a:endParaRPr lang="en-US" sz="1800" dirty="0">
-              <a:effectLst/>
-              <a:latin typeface="Calibri" panose="020F0502020204030204" pitchFamily="34" charset="0"/>
-              <a:ea typeface="Calibri" panose="020F0502020204030204" pitchFamily="34" charset="0"/>
-              <a:cs typeface="Calibri" panose="020F0502020204030204" pitchFamily="34" charset="0"/>
-            </a:endParaRPr>
-          </a:p>
-          <a:p>
-            <a:r>
-              <a:rPr lang="en-US" sz="1800" dirty="0">
-                <a:effectLst/>
-                <a:latin typeface="Calibri" panose="020F0502020204030204" pitchFamily="34" charset="0"/>
-                <a:ea typeface="Calibri" panose="020F0502020204030204" pitchFamily="34" charset="0"/>
-                <a:cs typeface="Calibri" panose="020F0502020204030204" pitchFamily="34" charset="0"/>
-              </a:rPr>
-              <a:t>Williams, N., O’Brien, M., &amp; Yao, X. (2017). Using Survey Data for Agent-Based Modeling: Design and Challenges in a Model of Armed Conflict and Population Change. In Andree Grow &amp; J. Van </a:t>
-            </a:r>
-            <a:r>
-              <a:rPr lang="en-US" sz="1800" dirty="0" err="1">
-                <a:effectLst/>
-                <a:latin typeface="Calibri" panose="020F0502020204030204" pitchFamily="34" charset="0"/>
-                <a:ea typeface="Calibri" panose="020F0502020204030204" pitchFamily="34" charset="0"/>
-                <a:cs typeface="Calibri" panose="020F0502020204030204" pitchFamily="34" charset="0"/>
-              </a:rPr>
-              <a:t>Bavel</a:t>
-            </a:r>
-            <a:r>
-              <a:rPr lang="en-US" sz="1800" dirty="0">
-                <a:effectLst/>
-                <a:latin typeface="Calibri" panose="020F0502020204030204" pitchFamily="34" charset="0"/>
-                <a:ea typeface="Calibri" panose="020F0502020204030204" pitchFamily="34" charset="0"/>
-                <a:cs typeface="Calibri" panose="020F0502020204030204" pitchFamily="34" charset="0"/>
-              </a:rPr>
-              <a:t> (Eds.), </a:t>
-            </a:r>
-            <a:r>
-              <a:rPr lang="en-US" sz="1800" i="1" dirty="0">
-                <a:effectLst/>
-                <a:latin typeface="Calibri" panose="020F0502020204030204" pitchFamily="34" charset="0"/>
-                <a:ea typeface="Calibri" panose="020F0502020204030204" pitchFamily="34" charset="0"/>
-                <a:cs typeface="Calibri" panose="020F0502020204030204" pitchFamily="34" charset="0"/>
-              </a:rPr>
-              <a:t>Agent-Based Modelling in Population Studies</a:t>
-            </a:r>
-            <a:r>
-              <a:rPr lang="en-US" sz="1800" dirty="0">
-                <a:effectLst/>
-                <a:latin typeface="Calibri" panose="020F0502020204030204" pitchFamily="34" charset="0"/>
-                <a:ea typeface="Calibri" panose="020F0502020204030204" pitchFamily="34" charset="0"/>
-                <a:cs typeface="Calibri" panose="020F0502020204030204" pitchFamily="34" charset="0"/>
-              </a:rPr>
-              <a:t> (pp. 159–184). Springer. https://doi.org/10.1007/978-3-319-32283-4_6</a:t>
-            </a:r>
-            <a:endParaRPr lang="en-GB" sz="1800" dirty="0">
-              <a:effectLst/>
-              <a:latin typeface="Calibri" panose="020F0502020204030204" pitchFamily="34" charset="0"/>
-              <a:ea typeface="Calibri" panose="020F0502020204030204" pitchFamily="34" charset="0"/>
-              <a:cs typeface="Calibri" panose="020F0502020204030204" pitchFamily="34" charset="0"/>
-            </a:endParaRPr>
-          </a:p>
-          <a:p>
-            <a:r>
-              <a:rPr lang="en-US" sz="1800" dirty="0" err="1">
-                <a:effectLst/>
-                <a:latin typeface="Calibri" panose="020F0502020204030204" pitchFamily="34" charset="0"/>
-                <a:ea typeface="Calibri" panose="020F0502020204030204" pitchFamily="34" charset="0"/>
-                <a:cs typeface="Calibri" panose="020F0502020204030204" pitchFamily="34" charset="0"/>
-              </a:rPr>
-              <a:t>Zagheni</a:t>
-            </a:r>
-            <a:r>
-              <a:rPr lang="en-US" sz="1800" dirty="0">
-                <a:effectLst/>
-                <a:latin typeface="Calibri" panose="020F0502020204030204" pitchFamily="34" charset="0"/>
-                <a:ea typeface="Calibri" panose="020F0502020204030204" pitchFamily="34" charset="0"/>
-                <a:cs typeface="Calibri" panose="020F0502020204030204" pitchFamily="34" charset="0"/>
-              </a:rPr>
-              <a:t>, E. (2015). Microsimulation in Demographic Research. In J. D. Wright (Ed.), </a:t>
-            </a:r>
-            <a:r>
-              <a:rPr lang="en-US" sz="1800" i="1" dirty="0">
-                <a:effectLst/>
-                <a:latin typeface="Calibri" panose="020F0502020204030204" pitchFamily="34" charset="0"/>
-                <a:ea typeface="Calibri" panose="020F0502020204030204" pitchFamily="34" charset="0"/>
-                <a:cs typeface="Calibri" panose="020F0502020204030204" pitchFamily="34" charset="0"/>
-              </a:rPr>
-              <a:t>International Encyclopedia of the Social &amp; Behavioral Sciences</a:t>
-            </a:r>
-            <a:r>
-              <a:rPr lang="en-US" sz="1800" dirty="0">
-                <a:effectLst/>
-                <a:latin typeface="Calibri" panose="020F0502020204030204" pitchFamily="34" charset="0"/>
-                <a:ea typeface="Calibri" panose="020F0502020204030204" pitchFamily="34" charset="0"/>
-                <a:cs typeface="Calibri" panose="020F0502020204030204" pitchFamily="34" charset="0"/>
-              </a:rPr>
-              <a:t>. https://doi.org/10.1016/b0-08-043076-7/02115-x</a:t>
-            </a:r>
-            <a:endParaRPr lang="en-GB" sz="1800" dirty="0">
-              <a:effectLst/>
-              <a:latin typeface="Calibri" panose="020F0502020204030204" pitchFamily="34" charset="0"/>
-              <a:ea typeface="Calibri" panose="020F0502020204030204" pitchFamily="34" charset="0"/>
-              <a:cs typeface="Calibri" panose="020F0502020204030204" pitchFamily="34" charset="0"/>
-            </a:endParaRPr>
-          </a:p>
-          <a:p>
-            <a:endParaRPr lang="en-GB" sz="1800" dirty="0">
-              <a:effectLst/>
-              <a:latin typeface="Calibri" panose="020F0502020204030204" pitchFamily="34" charset="0"/>
-              <a:ea typeface="Calibri" panose="020F0502020204030204" pitchFamily="34" charset="0"/>
-              <a:cs typeface="Calibri" panose="020F0502020204030204" pitchFamily="34" charset="0"/>
-            </a:endParaRPr>
-          </a:p>
-          <a:p>
+              <a:t>Thanks</a:t>
+            </a:r>
+            <a:r>
+              <a:rPr lang="es-ES" dirty="0"/>
+              <a:t>!</a:t>
+            </a:r>
+            <a:br>
+              <a:rPr lang="en-GB" dirty="0"/>
+            </a:br>
             <a:endParaRPr lang="en-GB" dirty="0"/>
           </a:p>
         </p:txBody>
@@ -6884,7 +6742,7 @@
     </p:spTree>
     <p:extLst>
       <p:ext uri="{BB962C8B-B14F-4D97-AF65-F5344CB8AC3E}">
-        <p14:creationId xmlns:p14="http://schemas.microsoft.com/office/powerpoint/2010/main" val="2011959159"/>
+        <p14:creationId xmlns:p14="http://schemas.microsoft.com/office/powerpoint/2010/main" val="2134528185"/>
       </p:ext>
     </p:extLst>
   </p:cSld>
@@ -6916,72 +6774,6 @@
           <p:cNvPr id="2" name="Title 1">
             <a:extLst>
               <a:ext uri="{FF2B5EF4-FFF2-40B4-BE49-F238E27FC236}">
-                <a16:creationId xmlns:a16="http://schemas.microsoft.com/office/drawing/2014/main" id="{0723D4C3-2771-2ECA-3A40-9AE014D8725C}"/>
-              </a:ext>
-            </a:extLst>
-          </p:cNvPr>
-          <p:cNvSpPr>
-            <a:spLocks noGrp="1"/>
-          </p:cNvSpPr>
-          <p:nvPr>
-            <p:ph type="title"/>
-          </p:nvPr>
-        </p:nvSpPr>
-        <p:spPr/>
-        <p:txBody>
-          <a:bodyPr/>
-          <a:lstStyle/>
-          <a:p>
-            <a:r>
-              <a:rPr lang="es-ES" dirty="0" err="1"/>
-              <a:t>Thanks</a:t>
-            </a:r>
-            <a:r>
-              <a:rPr lang="es-ES" dirty="0"/>
-              <a:t>!</a:t>
-            </a:r>
-            <a:br>
-              <a:rPr lang="en-GB" dirty="0"/>
-            </a:br>
-            <a:endParaRPr lang="en-GB" dirty="0"/>
-          </a:p>
-        </p:txBody>
-      </p:sp>
-    </p:spTree>
-    <p:extLst>
-      <p:ext uri="{BB962C8B-B14F-4D97-AF65-F5344CB8AC3E}">
-        <p14:creationId xmlns:p14="http://schemas.microsoft.com/office/powerpoint/2010/main" val="2134528185"/>
-      </p:ext>
-    </p:extLst>
-  </p:cSld>
-  <p:clrMapOvr>
-    <a:masterClrMapping/>
-  </p:clrMapOvr>
-</p:sld>
-</file>
-
-<file path=ppt/slides/slide23.xml><?xml version="1.0" encoding="utf-8"?>
-<p:sld xmlns:a="http://schemas.openxmlformats.org/drawingml/2006/main" xmlns:r="http://schemas.openxmlformats.org/officeDocument/2006/relationships" xmlns:p="http://schemas.openxmlformats.org/presentationml/2006/main">
-  <p:cSld>
-    <p:spTree>
-      <p:nvGrpSpPr>
-        <p:cNvPr id="1" name=""/>
-        <p:cNvGrpSpPr/>
-        <p:nvPr/>
-      </p:nvGrpSpPr>
-      <p:grpSpPr>
-        <a:xfrm>
-          <a:off x="0" y="0"/>
-          <a:ext cx="0" cy="0"/>
-          <a:chOff x="0" y="0"/>
-          <a:chExt cx="0" cy="0"/>
-        </a:xfrm>
-      </p:grpSpPr>
-      <p:sp>
-        <p:nvSpPr>
-          <p:cNvPr id="2" name="Title 1">
-            <a:extLst>
-              <a:ext uri="{FF2B5EF4-FFF2-40B4-BE49-F238E27FC236}">
                 <a16:creationId xmlns:a16="http://schemas.microsoft.com/office/drawing/2014/main" id="{0677AF2A-1E92-4745-8A44-907398137C2A}"/>
               </a:ext>
             </a:extLst>
@@ -7157,7 +6949,7 @@
           <p:cNvPr id="2" name="Title 1">
             <a:extLst>
               <a:ext uri="{FF2B5EF4-FFF2-40B4-BE49-F238E27FC236}">
-                <a16:creationId xmlns:a16="http://schemas.microsoft.com/office/drawing/2014/main" id="{EF622F83-EA54-B630-935F-FB12184E605A}"/>
+                <a16:creationId xmlns:a16="http://schemas.microsoft.com/office/drawing/2014/main" id="{678ECED7-0004-4B27-1C4F-A0A7199DF47A}"/>
               </a:ext>
             </a:extLst>
           </p:cNvPr>
@@ -7169,88 +6961,227 @@
           </p:nvPr>
         </p:nvSpPr>
         <p:spPr/>
-        <p:txBody>
-          <a:bodyPr/>
-          <a:lstStyle/>
-          <a:p>
-            <a:r>
-              <a:rPr lang="es-ES" dirty="0" err="1"/>
-              <a:t>Structure</a:t>
-            </a:r>
-            <a:endParaRPr lang="en-GB" dirty="0"/>
-          </a:p>
-        </p:txBody>
-      </p:sp>
-      <p:sp>
-        <p:nvSpPr>
-          <p:cNvPr id="3" name="Content Placeholder 2">
-            <a:extLst>
-              <a:ext uri="{FF2B5EF4-FFF2-40B4-BE49-F238E27FC236}">
-                <a16:creationId xmlns:a16="http://schemas.microsoft.com/office/drawing/2014/main" id="{59F83986-57A7-1335-ADBA-66281645B0D3}"/>
-              </a:ext>
-            </a:extLst>
-          </p:cNvPr>
-          <p:cNvSpPr>
-            <a:spLocks noGrp="1"/>
-          </p:cNvSpPr>
-          <p:nvPr>
-            <p:ph idx="1"/>
-          </p:nvPr>
-        </p:nvSpPr>
-        <p:spPr>
-          <a:xfrm>
-            <a:off x="838200" y="1825624"/>
-            <a:ext cx="10515600" cy="1747893"/>
-          </a:xfrm>
-        </p:spPr>
         <p:txBody>
           <a:bodyPr>
             <a:normAutofit/>
           </a:bodyPr>
           <a:lstStyle/>
           <a:p>
-            <a:pPr marL="514350" indent="-514350">
-              <a:buFont typeface="+mj-lt"/>
-              <a:buAutoNum type="arabicPeriod"/>
+            <a:r>
+              <a:rPr lang="en-US" dirty="0"/>
+              <a:t>Agent-based models: what is this method and why to use it? </a:t>
+            </a:r>
+          </a:p>
+        </p:txBody>
+      </p:sp>
+      <p:sp>
+        <p:nvSpPr>
+          <p:cNvPr id="3" name="Content Placeholder 2">
+            <a:extLst>
+              <a:ext uri="{FF2B5EF4-FFF2-40B4-BE49-F238E27FC236}">
+                <a16:creationId xmlns:a16="http://schemas.microsoft.com/office/drawing/2014/main" id="{06EAD3D5-50DE-59D4-9245-A3B0FF8834D1}"/>
+              </a:ext>
+            </a:extLst>
+          </p:cNvPr>
+          <p:cNvSpPr>
+            <a:spLocks noGrp="1"/>
+          </p:cNvSpPr>
+          <p:nvPr>
+            <p:ph idx="1"/>
+          </p:nvPr>
+        </p:nvSpPr>
+        <p:spPr>
+          <a:xfrm>
+            <a:off x="838200" y="1920217"/>
+            <a:ext cx="10515600" cy="4806403"/>
+          </a:xfrm>
+        </p:spPr>
+        <p:txBody>
+          <a:bodyPr>
+            <a:normAutofit/>
+          </a:bodyPr>
+          <a:lstStyle/>
+          <a:p>
+            <a:pPr lvl="1">
+              <a:buFontTx/>
+              <a:buChar char="-"/>
             </a:pPr>
+            <a:endParaRPr lang="en-US" sz="2200" dirty="0">
+              <a:latin typeface="Times New Roman" panose="02020603050405020304" pitchFamily="18" charset="0"/>
+              <a:ea typeface="Times New Roman" panose="02020603050405020304" pitchFamily="18" charset="0"/>
+            </a:endParaRPr>
+          </a:p>
+          <a:p>
+            <a:pPr marL="457200" lvl="1" indent="0">
+              <a:buNone/>
+            </a:pPr>
+            <a:r>
+              <a:rPr lang="en-US" dirty="0">
+                <a:hlinkClick r:id="rId2"/>
+              </a:rPr>
+              <a:t>Link</a:t>
+            </a:r>
             <a:r>
               <a:rPr lang="en-US" dirty="0"/>
-              <a:t>Agent-based models: what is this method and why to use it?</a:t>
-            </a:r>
-          </a:p>
-          <a:p>
-            <a:pPr marL="514350" indent="-514350">
-              <a:buFont typeface="+mj-lt"/>
-              <a:buAutoNum type="arabicPeriod"/>
+              <a:t> starlings movement.</a:t>
+            </a:r>
+          </a:p>
+          <a:p>
+            <a:pPr marL="457200" lvl="1" indent="0">
+              <a:buNone/>
             </a:pPr>
-            <a:r>
-              <a:rPr lang="en-US" dirty="0"/>
-              <a:t>Some examples + code.</a:t>
-            </a:r>
-          </a:p>
-          <a:p>
-            <a:pPr marL="514350" indent="-514350">
-              <a:buFont typeface="+mj-lt"/>
-              <a:buAutoNum type="arabicPeriod"/>
+            <a:endParaRPr lang="en-US" dirty="0"/>
+          </a:p>
+          <a:p>
+            <a:pPr lvl="1">
+              <a:buFontTx/>
+              <a:buChar char="-"/>
             </a:pPr>
             <a:r>
-              <a:rPr lang="en-US" dirty="0"/>
-              <a:t>Survey-based ABM + code</a:t>
-            </a:r>
-          </a:p>
-          <a:p>
-            <a:pPr lvl="1"/>
+              <a:rPr lang="en-US" sz="2400" dirty="0">
+                <a:latin typeface="Times New Roman" panose="02020603050405020304" pitchFamily="18" charset="0"/>
+                <a:ea typeface="Times New Roman" panose="02020603050405020304" pitchFamily="18" charset="0"/>
+              </a:rPr>
+              <a:t>Modelling purposes: </a:t>
+            </a:r>
+            <a:r>
+              <a:rPr lang="en-US" sz="2400" dirty="0">
+                <a:latin typeface="Times New Roman" panose="02020603050405020304" pitchFamily="18" charset="0"/>
+              </a:rPr>
+              <a:t>describe, explain, predict (</a:t>
+            </a:r>
+            <a:r>
+              <a:rPr lang="ca-ES" sz="2400" dirty="0" err="1">
+                <a:latin typeface="Times New Roman" panose="02020603050405020304" pitchFamily="18" charset="0"/>
+              </a:rPr>
+              <a:t>Edmonds</a:t>
+            </a:r>
+            <a:r>
+              <a:rPr lang="ca-ES" sz="2400" dirty="0">
+                <a:latin typeface="Times New Roman" panose="02020603050405020304" pitchFamily="18" charset="0"/>
+              </a:rPr>
+              <a:t> et al., 2019)</a:t>
+            </a:r>
+            <a:r>
+              <a:rPr lang="en-US" sz="2400" dirty="0">
+                <a:latin typeface="Times New Roman" panose="02020603050405020304" pitchFamily="18" charset="0"/>
+              </a:rPr>
+              <a:t>.</a:t>
+            </a:r>
+          </a:p>
+          <a:p>
+            <a:pPr lvl="1">
+              <a:buFontTx/>
+              <a:buChar char="-"/>
+            </a:pPr>
+            <a:r>
+              <a:rPr lang="en-US" sz="2400" dirty="0">
+                <a:effectLst/>
+                <a:latin typeface="Times New Roman" panose="02020603050405020304" pitchFamily="18" charset="0"/>
+                <a:ea typeface="Times New Roman" panose="02020603050405020304" pitchFamily="18" charset="0"/>
+              </a:rPr>
+              <a:t>B</a:t>
+            </a:r>
+            <a:r>
+              <a:rPr lang="en-US" sz="2400" dirty="0">
+                <a:latin typeface="Times New Roman" panose="02020603050405020304" pitchFamily="18" charset="0"/>
+              </a:rPr>
+              <a:t>ottom-up / microlevel approach vs Top-down / Macrolevel approach</a:t>
+            </a:r>
+          </a:p>
+          <a:p>
+            <a:pPr lvl="1">
+              <a:buFontTx/>
+              <a:buChar char="-"/>
+            </a:pPr>
+            <a:r>
+              <a:rPr lang="en-US" sz="2400" dirty="0">
+                <a:latin typeface="Times New Roman" panose="02020603050405020304" pitchFamily="18" charset="0"/>
+                <a:ea typeface="Times New Roman" panose="02020603050405020304" pitchFamily="18" charset="0"/>
+              </a:rPr>
+              <a:t>S</a:t>
+            </a:r>
+            <a:r>
+              <a:rPr lang="en-US" sz="2400" dirty="0">
+                <a:effectLst/>
+                <a:latin typeface="Times New Roman" panose="02020603050405020304" pitchFamily="18" charset="0"/>
+                <a:ea typeface="Times New Roman" panose="02020603050405020304" pitchFamily="18" charset="0"/>
+              </a:rPr>
+              <a:t>imulate agents with built-in </a:t>
+            </a:r>
+            <a:r>
+              <a:rPr lang="en-US" sz="2400" dirty="0" err="1">
+                <a:effectLst/>
+                <a:latin typeface="Times New Roman" panose="02020603050405020304" pitchFamily="18" charset="0"/>
+                <a:ea typeface="Times New Roman" panose="02020603050405020304" pitchFamily="18" charset="0"/>
+              </a:rPr>
+              <a:t>behavioural</a:t>
+            </a:r>
+            <a:r>
+              <a:rPr lang="en-US" sz="2400" dirty="0">
+                <a:effectLst/>
+                <a:latin typeface="Times New Roman" panose="02020603050405020304" pitchFamily="18" charset="0"/>
+                <a:ea typeface="Times New Roman" panose="02020603050405020304" pitchFamily="18" charset="0"/>
+              </a:rPr>
+              <a:t> rules of action and their interactions.</a:t>
+            </a:r>
+          </a:p>
+          <a:p>
+            <a:pPr lvl="1">
+              <a:buFontTx/>
+              <a:buChar char="-"/>
+            </a:pPr>
+            <a:r>
+              <a:rPr lang="en-US" sz="2400" dirty="0">
+                <a:latin typeface="Times New Roman" panose="02020603050405020304" pitchFamily="18" charset="0"/>
+              </a:rPr>
+              <a:t>Incorporating transitions to conceptually relevant states</a:t>
+            </a:r>
+            <a:endParaRPr lang="en-US" sz="2400" dirty="0">
+              <a:effectLst/>
+              <a:latin typeface="Times New Roman" panose="02020603050405020304" pitchFamily="18" charset="0"/>
+              <a:ea typeface="Times New Roman" panose="02020603050405020304" pitchFamily="18" charset="0"/>
+            </a:endParaRPr>
+          </a:p>
+          <a:p>
+            <a:pPr lvl="1">
+              <a:buFontTx/>
+              <a:buChar char="-"/>
+            </a:pPr>
+            <a:r>
+              <a:rPr lang="en-US" sz="2400" dirty="0">
+                <a:latin typeface="Times New Roman" panose="02020603050405020304" pitchFamily="18" charset="0"/>
+                <a:ea typeface="Times New Roman" panose="02020603050405020304" pitchFamily="18" charset="0"/>
+              </a:rPr>
+              <a:t>T</a:t>
+            </a:r>
+            <a:r>
+              <a:rPr lang="en-US" sz="2400" dirty="0">
+                <a:effectLst/>
+                <a:latin typeface="Times New Roman" panose="02020603050405020304" pitchFamily="18" charset="0"/>
+                <a:ea typeface="Times New Roman" panose="02020603050405020304" pitchFamily="18" charset="0"/>
+              </a:rPr>
+              <a:t>o study the emergence of global patterns</a:t>
+            </a:r>
+            <a:r>
+              <a:rPr lang="ca-ES" sz="2400" dirty="0">
+                <a:effectLst/>
+                <a:latin typeface="Times New Roman" panose="02020603050405020304" pitchFamily="18" charset="0"/>
+                <a:ea typeface="Times New Roman" panose="02020603050405020304" pitchFamily="18" charset="0"/>
+              </a:rPr>
+              <a:t>.</a:t>
+            </a:r>
+          </a:p>
+          <a:p>
+            <a:pPr marL="457200" lvl="1" indent="0">
+              <a:buNone/>
+            </a:pPr>
             <a:endParaRPr lang="en-US" dirty="0"/>
           </a:p>
           <a:p>
-            <a:pPr lvl="1"/>
-            <a:endParaRPr lang="en-US" dirty="0"/>
-          </a:p>
-          <a:p>
-            <a:pPr lvl="1"/>
-            <a:endParaRPr lang="en-US" dirty="0"/>
-          </a:p>
-          <a:p>
+            <a:pPr marL="457200" lvl="1" indent="0">
+              <a:buNone/>
+            </a:pPr>
             <a:endParaRPr lang="en-US" dirty="0"/>
           </a:p>
         </p:txBody>
@@ -7258,7 +7189,7 @@
     </p:spTree>
     <p:extLst>
       <p:ext uri="{BB962C8B-B14F-4D97-AF65-F5344CB8AC3E}">
-        <p14:creationId xmlns:p14="http://schemas.microsoft.com/office/powerpoint/2010/main" val="2737110927"/>
+        <p14:creationId xmlns:p14="http://schemas.microsoft.com/office/powerpoint/2010/main" val="1344563930"/>
       </p:ext>
     </p:extLst>
   </p:cSld>
@@ -7290,278 +7221,6 @@
           <p:cNvPr id="2" name="Title 1">
             <a:extLst>
               <a:ext uri="{FF2B5EF4-FFF2-40B4-BE49-F238E27FC236}">
-                <a16:creationId xmlns:a16="http://schemas.microsoft.com/office/drawing/2014/main" id="{678ECED7-0004-4B27-1C4F-A0A7199DF47A}"/>
-              </a:ext>
-            </a:extLst>
-          </p:cNvPr>
-          <p:cNvSpPr>
-            <a:spLocks noGrp="1"/>
-          </p:cNvSpPr>
-          <p:nvPr>
-            <p:ph type="title"/>
-          </p:nvPr>
-        </p:nvSpPr>
-        <p:spPr/>
-        <p:txBody>
-          <a:bodyPr>
-            <a:normAutofit/>
-          </a:bodyPr>
-          <a:lstStyle/>
-          <a:p>
-            <a:r>
-              <a:rPr lang="en-US" dirty="0"/>
-              <a:t>Agent-based models: what is this method and why to use it? </a:t>
-            </a:r>
-          </a:p>
-        </p:txBody>
-      </p:sp>
-      <p:sp>
-        <p:nvSpPr>
-          <p:cNvPr id="3" name="Content Placeholder 2">
-            <a:extLst>
-              <a:ext uri="{FF2B5EF4-FFF2-40B4-BE49-F238E27FC236}">
-                <a16:creationId xmlns:a16="http://schemas.microsoft.com/office/drawing/2014/main" id="{06EAD3D5-50DE-59D4-9245-A3B0FF8834D1}"/>
-              </a:ext>
-            </a:extLst>
-          </p:cNvPr>
-          <p:cNvSpPr>
-            <a:spLocks noGrp="1"/>
-          </p:cNvSpPr>
-          <p:nvPr>
-            <p:ph idx="1"/>
-          </p:nvPr>
-        </p:nvSpPr>
-        <p:spPr>
-          <a:xfrm>
-            <a:off x="838200" y="1920217"/>
-            <a:ext cx="10515600" cy="4806403"/>
-          </a:xfrm>
-        </p:spPr>
-        <p:txBody>
-          <a:bodyPr>
-            <a:normAutofit/>
-          </a:bodyPr>
-          <a:lstStyle/>
-          <a:p>
-            <a:pPr lvl="1">
-              <a:buFontTx/>
-              <a:buChar char="-"/>
-            </a:pPr>
-            <a:endParaRPr lang="en-US" sz="2200" dirty="0">
-              <a:latin typeface="Times New Roman" panose="02020603050405020304" pitchFamily="18" charset="0"/>
-              <a:ea typeface="Times New Roman" panose="02020603050405020304" pitchFamily="18" charset="0"/>
-            </a:endParaRPr>
-          </a:p>
-          <a:p>
-            <a:pPr marL="457200" lvl="1" indent="0">
-              <a:buNone/>
-            </a:pPr>
-            <a:r>
-              <a:rPr lang="en-US" dirty="0">
-                <a:hlinkClick r:id="rId2"/>
-              </a:rPr>
-              <a:t>Link</a:t>
-            </a:r>
-            <a:r>
-              <a:rPr lang="en-US" dirty="0"/>
-              <a:t> starlings movement.</a:t>
-            </a:r>
-          </a:p>
-          <a:p>
-            <a:pPr marL="457200" lvl="1" indent="0">
-              <a:buNone/>
-            </a:pPr>
-            <a:endParaRPr lang="en-US" dirty="0"/>
-          </a:p>
-          <a:p>
-            <a:pPr lvl="1">
-              <a:buFontTx/>
-              <a:buChar char="-"/>
-            </a:pPr>
-            <a:r>
-              <a:rPr lang="en-US" sz="2400" dirty="0">
-                <a:latin typeface="Times New Roman" panose="02020603050405020304" pitchFamily="18" charset="0"/>
-                <a:ea typeface="Times New Roman" panose="02020603050405020304" pitchFamily="18" charset="0"/>
-              </a:rPr>
-              <a:t>Modelling purposes: </a:t>
-            </a:r>
-            <a:r>
-              <a:rPr lang="en-US" sz="2400" dirty="0">
-                <a:latin typeface="Times New Roman" panose="02020603050405020304" pitchFamily="18" charset="0"/>
-              </a:rPr>
-              <a:t>describe, explain, predict (</a:t>
-            </a:r>
-            <a:r>
-              <a:rPr lang="ca-ES" sz="2400" dirty="0" err="1">
-                <a:latin typeface="Times New Roman" panose="02020603050405020304" pitchFamily="18" charset="0"/>
-              </a:rPr>
-              <a:t>Edmonds</a:t>
-            </a:r>
-            <a:r>
-              <a:rPr lang="ca-ES" sz="2400" dirty="0">
-                <a:latin typeface="Times New Roman" panose="02020603050405020304" pitchFamily="18" charset="0"/>
-              </a:rPr>
-              <a:t> et al., 2019)</a:t>
-            </a:r>
-            <a:r>
-              <a:rPr lang="en-US" sz="2400" dirty="0">
-                <a:latin typeface="Times New Roman" panose="02020603050405020304" pitchFamily="18" charset="0"/>
-              </a:rPr>
-              <a:t>.</a:t>
-            </a:r>
-          </a:p>
-          <a:p>
-            <a:pPr lvl="1">
-              <a:buFontTx/>
-              <a:buChar char="-"/>
-            </a:pPr>
-            <a:r>
-              <a:rPr lang="en-US" sz="2400" dirty="0">
-                <a:effectLst/>
-                <a:latin typeface="Times New Roman" panose="02020603050405020304" pitchFamily="18" charset="0"/>
-                <a:ea typeface="Times New Roman" panose="02020603050405020304" pitchFamily="18" charset="0"/>
-              </a:rPr>
-              <a:t>B</a:t>
-            </a:r>
-            <a:r>
-              <a:rPr lang="en-US" sz="2400" dirty="0">
-                <a:latin typeface="Times New Roman" panose="02020603050405020304" pitchFamily="18" charset="0"/>
-              </a:rPr>
-              <a:t>ottom-up / microlevel approach vs Top-down / Macrolevel approach</a:t>
-            </a:r>
-          </a:p>
-          <a:p>
-            <a:pPr lvl="1">
-              <a:buFontTx/>
-              <a:buChar char="-"/>
-            </a:pPr>
-            <a:r>
-              <a:rPr lang="en-US" sz="2400" dirty="0">
-                <a:latin typeface="Times New Roman" panose="02020603050405020304" pitchFamily="18" charset="0"/>
-                <a:ea typeface="Times New Roman" panose="02020603050405020304" pitchFamily="18" charset="0"/>
-              </a:rPr>
-              <a:t>S</a:t>
-            </a:r>
-            <a:r>
-              <a:rPr lang="en-US" sz="2400" dirty="0">
-                <a:effectLst/>
-                <a:latin typeface="Times New Roman" panose="02020603050405020304" pitchFamily="18" charset="0"/>
-                <a:ea typeface="Times New Roman" panose="02020603050405020304" pitchFamily="18" charset="0"/>
-              </a:rPr>
-              <a:t>imulate agents with built-in </a:t>
-            </a:r>
-            <a:r>
-              <a:rPr lang="en-US" sz="2400" dirty="0" err="1">
-                <a:effectLst/>
-                <a:latin typeface="Times New Roman" panose="02020603050405020304" pitchFamily="18" charset="0"/>
-                <a:ea typeface="Times New Roman" panose="02020603050405020304" pitchFamily="18" charset="0"/>
-              </a:rPr>
-              <a:t>behavioural</a:t>
-            </a:r>
-            <a:r>
-              <a:rPr lang="en-US" sz="2400" dirty="0">
-                <a:effectLst/>
-                <a:latin typeface="Times New Roman" panose="02020603050405020304" pitchFamily="18" charset="0"/>
-                <a:ea typeface="Times New Roman" panose="02020603050405020304" pitchFamily="18" charset="0"/>
-              </a:rPr>
-              <a:t> rules of action and their interactions.</a:t>
-            </a:r>
-          </a:p>
-          <a:p>
-            <a:pPr lvl="1">
-              <a:buFontTx/>
-              <a:buChar char="-"/>
-            </a:pPr>
-            <a:r>
-              <a:rPr lang="en-US" sz="2400" dirty="0">
-                <a:latin typeface="Times New Roman" panose="02020603050405020304" pitchFamily="18" charset="0"/>
-              </a:rPr>
-              <a:t>Incorporating transitions to conceptually relevant states</a:t>
-            </a:r>
-            <a:endParaRPr lang="en-US" sz="2400" dirty="0">
-              <a:effectLst/>
-              <a:latin typeface="Times New Roman" panose="02020603050405020304" pitchFamily="18" charset="0"/>
-              <a:ea typeface="Times New Roman" panose="02020603050405020304" pitchFamily="18" charset="0"/>
-            </a:endParaRPr>
-          </a:p>
-          <a:p>
-            <a:pPr lvl="1">
-              <a:buFontTx/>
-              <a:buChar char="-"/>
-            </a:pPr>
-            <a:r>
-              <a:rPr lang="en-US" sz="2400" dirty="0">
-                <a:latin typeface="Times New Roman" panose="02020603050405020304" pitchFamily="18" charset="0"/>
-                <a:ea typeface="Times New Roman" panose="02020603050405020304" pitchFamily="18" charset="0"/>
-              </a:rPr>
-              <a:t>T</a:t>
-            </a:r>
-            <a:r>
-              <a:rPr lang="en-US" sz="2400" dirty="0">
-                <a:effectLst/>
-                <a:latin typeface="Times New Roman" panose="02020603050405020304" pitchFamily="18" charset="0"/>
-                <a:ea typeface="Times New Roman" panose="02020603050405020304" pitchFamily="18" charset="0"/>
-              </a:rPr>
-              <a:t>o study the emergence of global patterns</a:t>
-            </a:r>
-            <a:r>
-              <a:rPr lang="ca-ES" sz="2400" dirty="0">
-                <a:effectLst/>
-                <a:latin typeface="Times New Roman" panose="02020603050405020304" pitchFamily="18" charset="0"/>
-                <a:ea typeface="Times New Roman" panose="02020603050405020304" pitchFamily="18" charset="0"/>
-              </a:rPr>
-              <a:t>.</a:t>
-            </a:r>
-          </a:p>
-          <a:p>
-            <a:pPr marL="457200" lvl="1" indent="0">
-              <a:buNone/>
-            </a:pPr>
-            <a:endParaRPr lang="en-US" dirty="0"/>
-          </a:p>
-          <a:p>
-            <a:pPr marL="457200" lvl="1" indent="0">
-              <a:buNone/>
-            </a:pPr>
-            <a:endParaRPr lang="en-US" dirty="0"/>
-          </a:p>
-        </p:txBody>
-      </p:sp>
-    </p:spTree>
-    <p:extLst>
-      <p:ext uri="{BB962C8B-B14F-4D97-AF65-F5344CB8AC3E}">
-        <p14:creationId xmlns:p14="http://schemas.microsoft.com/office/powerpoint/2010/main" val="1344563930"/>
-      </p:ext>
-    </p:extLst>
-  </p:cSld>
-  <p:clrMapOvr>
-    <a:masterClrMapping/>
-  </p:clrMapOvr>
-</p:sld>
-</file>
-
-<file path=ppt/slides/slide5.xml><?xml version="1.0" encoding="utf-8"?>
-<p:sld xmlns:a="http://schemas.openxmlformats.org/drawingml/2006/main" xmlns:r="http://schemas.openxmlformats.org/officeDocument/2006/relationships" xmlns:p="http://schemas.openxmlformats.org/presentationml/2006/main">
-  <p:cSld>
-    <p:spTree>
-      <p:nvGrpSpPr>
-        <p:cNvPr id="1" name=""/>
-        <p:cNvGrpSpPr/>
-        <p:nvPr/>
-      </p:nvGrpSpPr>
-      <p:grpSpPr>
-        <a:xfrm>
-          <a:off x="0" y="0"/>
-          <a:ext cx="0" cy="0"/>
-          <a:chOff x="0" y="0"/>
-          <a:chExt cx="0" cy="0"/>
-        </a:xfrm>
-      </p:grpSpPr>
-      <p:sp>
-        <p:nvSpPr>
-          <p:cNvPr id="2" name="Title 1">
-            <a:extLst>
-              <a:ext uri="{FF2B5EF4-FFF2-40B4-BE49-F238E27FC236}">
                 <a16:creationId xmlns:a16="http://schemas.microsoft.com/office/drawing/2014/main" id="{1CBCD40A-C27C-2F60-B113-491ACE29CFAA}"/>
               </a:ext>
             </a:extLst>
@@ -7714,238 +7373,7 @@
 </p:sld>
 </file>
 
-<file path=ppt/slides/slide6.xml><?xml version="1.0" encoding="utf-8"?>
-<p:sld xmlns:a="http://schemas.openxmlformats.org/drawingml/2006/main" xmlns:r="http://schemas.openxmlformats.org/officeDocument/2006/relationships" xmlns:p="http://schemas.openxmlformats.org/presentationml/2006/main">
-  <p:cSld>
-    <p:spTree>
-      <p:nvGrpSpPr>
-        <p:cNvPr id="1" name=""/>
-        <p:cNvGrpSpPr/>
-        <p:nvPr/>
-      </p:nvGrpSpPr>
-      <p:grpSpPr>
-        <a:xfrm>
-          <a:off x="0" y="0"/>
-          <a:ext cx="0" cy="0"/>
-          <a:chOff x="0" y="0"/>
-          <a:chExt cx="0" cy="0"/>
-        </a:xfrm>
-      </p:grpSpPr>
-      <p:sp>
-        <p:nvSpPr>
-          <p:cNvPr id="2" name="Title 1">
-            <a:extLst>
-              <a:ext uri="{FF2B5EF4-FFF2-40B4-BE49-F238E27FC236}">
-                <a16:creationId xmlns:a16="http://schemas.microsoft.com/office/drawing/2014/main" id="{A8EEE588-284E-8692-1643-6AFE5D158BBF}"/>
-              </a:ext>
-            </a:extLst>
-          </p:cNvPr>
-          <p:cNvSpPr>
-            <a:spLocks noGrp="1"/>
-          </p:cNvSpPr>
-          <p:nvPr>
-            <p:ph type="title"/>
-          </p:nvPr>
-        </p:nvSpPr>
-        <p:spPr/>
-        <p:txBody>
-          <a:bodyPr>
-            <a:normAutofit fontScale="90000"/>
-          </a:bodyPr>
-          <a:lstStyle/>
-          <a:p>
-            <a:r>
-              <a:rPr lang="en-US" sz="3600" dirty="0"/>
-              <a:t>Example 3: </a:t>
-            </a:r>
-            <a:br>
-              <a:rPr lang="en-US" sz="3600" dirty="0"/>
-            </a:br>
-            <a:r>
-              <a:rPr lang="en-US" sz="3600" dirty="0" err="1"/>
-              <a:t>Billari</a:t>
-            </a:r>
-            <a:r>
-              <a:rPr lang="en-US" sz="3600" dirty="0"/>
-              <a:t> et al 2007 studied the role of social pressure on aggregated marriage rates.</a:t>
-            </a:r>
-          </a:p>
-        </p:txBody>
-      </p:sp>
-      <p:sp>
-        <p:nvSpPr>
-          <p:cNvPr id="5" name="TextBox 4">
-            <a:extLst>
-              <a:ext uri="{FF2B5EF4-FFF2-40B4-BE49-F238E27FC236}">
-                <a16:creationId xmlns:a16="http://schemas.microsoft.com/office/drawing/2014/main" id="{EFE405F2-F155-E871-05FB-3350BB7AFC3F}"/>
-              </a:ext>
-            </a:extLst>
-          </p:cNvPr>
-          <p:cNvSpPr txBox="1"/>
-          <p:nvPr/>
-        </p:nvSpPr>
-        <p:spPr>
-          <a:xfrm>
-            <a:off x="533455" y="2058807"/>
-            <a:ext cx="10227286" cy="584775"/>
-          </a:xfrm>
-          <a:prstGeom prst="rect">
-            <a:avLst/>
-          </a:prstGeom>
-          <a:noFill/>
-        </p:spPr>
-        <p:txBody>
-          <a:bodyPr wrap="square">
-            <a:spAutoFit/>
-          </a:bodyPr>
-          <a:lstStyle/>
-          <a:p>
-            <a:pPr algn="just"/>
-            <a:r>
-              <a:rPr lang="en-GB" sz="1600" b="0" i="0" u="none" strike="noStrike" baseline="0" dirty="0"/>
-              <a:t>“The </a:t>
-            </a:r>
-            <a:r>
-              <a:rPr lang="en-GB" sz="1600" b="1" i="0" u="none" strike="noStrike" baseline="0" dirty="0"/>
-              <a:t>proportion of married people </a:t>
-            </a:r>
-            <a:r>
-              <a:rPr lang="en-GB" sz="1600" b="0" i="0" u="none" strike="noStrike" baseline="0" dirty="0"/>
-              <a:t>within the network of relevant others, </a:t>
-            </a:r>
-            <a:r>
-              <a:rPr lang="en-GB" sz="1600" b="0" i="1" u="none" strike="noStrike" baseline="0" dirty="0"/>
-              <a:t>pom</a:t>
-            </a:r>
-            <a:r>
-              <a:rPr lang="en-GB" sz="1600" b="0" i="0" u="none" strike="noStrike" baseline="0" dirty="0"/>
-              <a:t>, </a:t>
-            </a:r>
-            <a:r>
-              <a:rPr lang="en-GB" sz="1600" b="1" i="0" u="none" strike="noStrike" baseline="0" dirty="0"/>
-              <a:t>determines the social interaction effect</a:t>
-            </a:r>
-            <a:r>
-              <a:rPr lang="en-GB" sz="1600" b="0" i="0" u="none" strike="noStrike" baseline="0" dirty="0"/>
-              <a:t>…[s]</a:t>
-            </a:r>
-            <a:r>
-              <a:rPr lang="en-GB" sz="1600" b="0" i="0" u="none" strike="noStrike" baseline="0" dirty="0" err="1"/>
-              <a:t>ocial</a:t>
-            </a:r>
-            <a:r>
-              <a:rPr lang="en-GB" sz="1600" b="0" i="0" u="none" strike="noStrike" baseline="0" dirty="0"/>
-              <a:t> pressure is defined as a function of </a:t>
-            </a:r>
-            <a:r>
-              <a:rPr lang="en-GB" sz="1600" b="0" i="1" u="none" strike="noStrike" baseline="0" dirty="0"/>
-              <a:t>pom”</a:t>
-            </a:r>
-            <a:endParaRPr lang="en-US" sz="1600" dirty="0"/>
-          </a:p>
-        </p:txBody>
-      </p:sp>
-      <p:pic>
-        <p:nvPicPr>
-          <p:cNvPr id="9" name="Picture 8">
-            <a:extLst>
-              <a:ext uri="{FF2B5EF4-FFF2-40B4-BE49-F238E27FC236}">
-                <a16:creationId xmlns:a16="http://schemas.microsoft.com/office/drawing/2014/main" id="{9453DA29-CB26-42F7-D9C8-2C6557DBA6A0}"/>
-              </a:ext>
-            </a:extLst>
-          </p:cNvPr>
-          <p:cNvPicPr>
-            <a:picLocks noChangeAspect="1"/>
-          </p:cNvPicPr>
-          <p:nvPr/>
-        </p:nvPicPr>
-        <p:blipFill rotWithShape="1">
-          <a:blip r:embed="rId2"/>
-          <a:srcRect l="37816" t="17544" r="39953" b="71587"/>
-          <a:stretch/>
-        </p:blipFill>
-        <p:spPr>
-          <a:xfrm>
-            <a:off x="1987672" y="2924000"/>
-            <a:ext cx="2710452" cy="745432"/>
-          </a:xfrm>
-          <a:prstGeom prst="rect">
-            <a:avLst/>
-          </a:prstGeom>
-        </p:spPr>
-      </p:pic>
-      <p:pic>
-        <p:nvPicPr>
-          <p:cNvPr id="13" name="Picture 12">
-            <a:extLst>
-              <a:ext uri="{FF2B5EF4-FFF2-40B4-BE49-F238E27FC236}">
-                <a16:creationId xmlns:a16="http://schemas.microsoft.com/office/drawing/2014/main" id="{FD6BF1E2-F5FF-B952-DFFE-A23D863FB545}"/>
-              </a:ext>
-            </a:extLst>
-          </p:cNvPr>
-          <p:cNvPicPr>
-            <a:picLocks noChangeAspect="1"/>
-          </p:cNvPicPr>
-          <p:nvPr/>
-        </p:nvPicPr>
-        <p:blipFill rotWithShape="1">
-          <a:blip r:embed="rId3"/>
-          <a:srcRect l="30710" t="32000" r="37789" b="22246"/>
-          <a:stretch/>
-        </p:blipFill>
-        <p:spPr>
-          <a:xfrm>
-            <a:off x="1500352" y="3596477"/>
-            <a:ext cx="3840480" cy="3137836"/>
-          </a:xfrm>
-          <a:prstGeom prst="rect">
-            <a:avLst/>
-          </a:prstGeom>
-        </p:spPr>
-      </p:pic>
-      <p:pic>
-        <p:nvPicPr>
-          <p:cNvPr id="15" name="Picture 14">
-            <a:extLst>
-              <a:ext uri="{FF2B5EF4-FFF2-40B4-BE49-F238E27FC236}">
-                <a16:creationId xmlns:a16="http://schemas.microsoft.com/office/drawing/2014/main" id="{E2DD8960-B220-0186-3294-9724D72C7809}"/>
-              </a:ext>
-            </a:extLst>
-          </p:cNvPr>
-          <p:cNvPicPr>
-            <a:picLocks noChangeAspect="1"/>
-          </p:cNvPicPr>
-          <p:nvPr/>
-        </p:nvPicPr>
-        <p:blipFill rotWithShape="1">
-          <a:blip r:embed="rId4"/>
-          <a:srcRect l="34497" t="29613" r="35470" b="40773"/>
-          <a:stretch/>
-        </p:blipFill>
-        <p:spPr>
-          <a:xfrm>
-            <a:off x="6347112" y="2778663"/>
-            <a:ext cx="5216894" cy="2893570"/>
-          </a:xfrm>
-          <a:prstGeom prst="rect">
-            <a:avLst/>
-          </a:prstGeom>
-        </p:spPr>
-      </p:pic>
-    </p:spTree>
-    <p:extLst>
-      <p:ext uri="{BB962C8B-B14F-4D97-AF65-F5344CB8AC3E}">
-        <p14:creationId xmlns:p14="http://schemas.microsoft.com/office/powerpoint/2010/main" val="3589741998"/>
-      </p:ext>
-    </p:extLst>
-  </p:cSld>
-  <p:clrMapOvr>
-    <a:masterClrMapping/>
-  </p:clrMapOvr>
-</p:sld>
-</file>
-
-<file path=ppt/slides/slide7.xml><?xml version="1.0" encoding="utf-8"?>
+<file path=ppt/slides/slide5.xml><?xml version="1.0" encoding="utf-8"?>
 <p:sld xmlns:a="http://schemas.openxmlformats.org/drawingml/2006/main" xmlns:r="http://schemas.openxmlformats.org/officeDocument/2006/relationships" xmlns:p="http://schemas.openxmlformats.org/presentationml/2006/main">
   <p:cSld>
     <p:spTree>
@@ -8169,7 +7597,7 @@
 </p:sld>
 </file>
 
-<file path=ppt/slides/slide8.xml><?xml version="1.0" encoding="utf-8"?>
+<file path=ppt/slides/slide6.xml><?xml version="1.0" encoding="utf-8"?>
 <p:sld xmlns:a="http://schemas.openxmlformats.org/drawingml/2006/main" xmlns:r="http://schemas.openxmlformats.org/officeDocument/2006/relationships" xmlns:p="http://schemas.openxmlformats.org/presentationml/2006/main">
   <p:cSld>
     <p:spTree>
@@ -9852,6 +9280,351 @@
 </p:sld>
 </file>
 
+<file path=ppt/slides/slide7.xml><?xml version="1.0" encoding="utf-8"?>
+<p:sld xmlns:a="http://schemas.openxmlformats.org/drawingml/2006/main" xmlns:r="http://schemas.openxmlformats.org/officeDocument/2006/relationships" xmlns:p="http://schemas.openxmlformats.org/presentationml/2006/main">
+  <p:cSld>
+    <p:spTree>
+      <p:nvGrpSpPr>
+        <p:cNvPr id="1" name=""/>
+        <p:cNvGrpSpPr/>
+        <p:nvPr/>
+      </p:nvGrpSpPr>
+      <p:grpSpPr>
+        <a:xfrm>
+          <a:off x="0" y="0"/>
+          <a:ext cx="0" cy="0"/>
+          <a:chOff x="0" y="0"/>
+          <a:chExt cx="0" cy="0"/>
+        </a:xfrm>
+      </p:grpSpPr>
+      <p:sp>
+        <p:nvSpPr>
+          <p:cNvPr id="2" name="Title 1">
+            <a:extLst>
+              <a:ext uri="{FF2B5EF4-FFF2-40B4-BE49-F238E27FC236}">
+                <a16:creationId xmlns:a16="http://schemas.microsoft.com/office/drawing/2014/main" id="{62590990-B00B-01E7-5C74-E48B7D520D2D}"/>
+              </a:ext>
+            </a:extLst>
+          </p:cNvPr>
+          <p:cNvSpPr>
+            <a:spLocks noGrp="1"/>
+          </p:cNvSpPr>
+          <p:nvPr>
+            <p:ph type="title"/>
+          </p:nvPr>
+        </p:nvSpPr>
+        <p:spPr>
+          <a:xfrm>
+            <a:off x="838200" y="528754"/>
+            <a:ext cx="10515600" cy="1325563"/>
+          </a:xfrm>
+        </p:spPr>
+        <p:txBody>
+          <a:bodyPr/>
+          <a:lstStyle/>
+          <a:p>
+            <a:r>
+              <a:rPr lang="en-US" dirty="0"/>
+              <a:t>Theoretical ABM: let’s have a look to the Julia code.</a:t>
+            </a:r>
+          </a:p>
+        </p:txBody>
+      </p:sp>
+      <p:sp>
+        <p:nvSpPr>
+          <p:cNvPr id="3" name="TextBox 2">
+            <a:extLst>
+              <a:ext uri="{FF2B5EF4-FFF2-40B4-BE49-F238E27FC236}">
+                <a16:creationId xmlns:a16="http://schemas.microsoft.com/office/drawing/2014/main" id="{063EC124-CC29-A703-61C4-E106137D4AA4}"/>
+              </a:ext>
+            </a:extLst>
+          </p:cNvPr>
+          <p:cNvSpPr txBox="1"/>
+          <p:nvPr/>
+        </p:nvSpPr>
+        <p:spPr>
+          <a:xfrm>
+            <a:off x="838199" y="2232264"/>
+            <a:ext cx="8315425" cy="1846659"/>
+          </a:xfrm>
+          <a:prstGeom prst="rect">
+            <a:avLst/>
+          </a:prstGeom>
+          <a:noFill/>
+        </p:spPr>
+        <p:txBody>
+          <a:bodyPr wrap="square">
+            <a:spAutoFit/>
+          </a:bodyPr>
+          <a:lstStyle/>
+          <a:p>
+            <a:pPr marL="285750" indent="-285750">
+              <a:buFontTx/>
+              <a:buChar char="-"/>
+            </a:pPr>
+            <a:r>
+              <a:rPr lang="en-GB" sz="1600" dirty="0"/>
+              <a:t>5 main scripts defining:</a:t>
+            </a:r>
+          </a:p>
+          <a:p>
+            <a:pPr marL="742950" lvl="1" indent="-285750">
+              <a:buFontTx/>
+              <a:buChar char="-"/>
+            </a:pPr>
+            <a:r>
+              <a:rPr lang="en-GB" sz="1600" dirty="0"/>
+              <a:t>Agents</a:t>
+            </a:r>
+          </a:p>
+          <a:p>
+            <a:pPr marL="742950" lvl="1" indent="-285750">
+              <a:buFontTx/>
+              <a:buChar char="-"/>
+            </a:pPr>
+            <a:r>
+              <a:rPr lang="en-GB" sz="1600" dirty="0"/>
+              <a:t>Model</a:t>
+            </a:r>
+          </a:p>
+          <a:p>
+            <a:pPr marL="742950" lvl="1" indent="-285750">
+              <a:buFontTx/>
+              <a:buChar char="-"/>
+            </a:pPr>
+            <a:r>
+              <a:rPr lang="en-GB" sz="1600" dirty="0"/>
+              <a:t>Setup</a:t>
+            </a:r>
+          </a:p>
+          <a:p>
+            <a:pPr marL="742950" lvl="1" indent="-285750">
+              <a:buFontTx/>
+              <a:buChar char="-"/>
+            </a:pPr>
+            <a:r>
+              <a:rPr lang="en-GB" sz="1600" dirty="0"/>
+              <a:t>Run</a:t>
+            </a:r>
+          </a:p>
+          <a:p>
+            <a:pPr marL="742950" lvl="1" indent="-285750">
+              <a:buFontTx/>
+              <a:buChar char="-"/>
+            </a:pPr>
+            <a:r>
+              <a:rPr lang="en-GB" sz="1600" dirty="0"/>
+              <a:t>Scenarios</a:t>
+            </a:r>
+          </a:p>
+          <a:p>
+            <a:pPr marL="742950" lvl="1" indent="-285750">
+              <a:buFontTx/>
+              <a:buChar char="-"/>
+            </a:pPr>
+            <a:endParaRPr lang="es-ES" dirty="0"/>
+          </a:p>
+        </p:txBody>
+      </p:sp>
+    </p:spTree>
+    <p:extLst>
+      <p:ext uri="{BB962C8B-B14F-4D97-AF65-F5344CB8AC3E}">
+        <p14:creationId xmlns:p14="http://schemas.microsoft.com/office/powerpoint/2010/main" val="838203943"/>
+      </p:ext>
+    </p:extLst>
+  </p:cSld>
+  <p:clrMapOvr>
+    <a:masterClrMapping/>
+  </p:clrMapOvr>
+</p:sld>
+</file>
+
+<file path=ppt/slides/slide8.xml><?xml version="1.0" encoding="utf-8"?>
+<p:sld xmlns:a="http://schemas.openxmlformats.org/drawingml/2006/main" xmlns:r="http://schemas.openxmlformats.org/officeDocument/2006/relationships" xmlns:p="http://schemas.openxmlformats.org/presentationml/2006/main">
+  <p:cSld>
+    <p:spTree>
+      <p:nvGrpSpPr>
+        <p:cNvPr id="1" name=""/>
+        <p:cNvGrpSpPr/>
+        <p:nvPr/>
+      </p:nvGrpSpPr>
+      <p:grpSpPr>
+        <a:xfrm>
+          <a:off x="0" y="0"/>
+          <a:ext cx="0" cy="0"/>
+          <a:chOff x="0" y="0"/>
+          <a:chExt cx="0" cy="0"/>
+        </a:xfrm>
+      </p:grpSpPr>
+      <p:sp>
+        <p:nvSpPr>
+          <p:cNvPr id="2" name="Title 1">
+            <a:extLst>
+              <a:ext uri="{FF2B5EF4-FFF2-40B4-BE49-F238E27FC236}">
+                <a16:creationId xmlns:a16="http://schemas.microsoft.com/office/drawing/2014/main" id="{77088832-5AAA-A193-241F-1D19961A5ECA}"/>
+              </a:ext>
+            </a:extLst>
+          </p:cNvPr>
+          <p:cNvSpPr>
+            <a:spLocks noGrp="1"/>
+          </p:cNvSpPr>
+          <p:nvPr>
+            <p:ph type="title"/>
+          </p:nvPr>
+        </p:nvSpPr>
+        <p:spPr>
+          <a:xfrm>
+            <a:off x="1048407" y="136635"/>
+            <a:ext cx="10515600" cy="1325563"/>
+          </a:xfrm>
+        </p:spPr>
+        <p:txBody>
+          <a:bodyPr>
+            <a:normAutofit/>
+          </a:bodyPr>
+          <a:lstStyle/>
+          <a:p>
+            <a:r>
+              <a:rPr lang="en-US" dirty="0"/>
+              <a:t>How do survey-based ABMs look like? </a:t>
+            </a:r>
+          </a:p>
+        </p:txBody>
+      </p:sp>
+      <p:sp>
+        <p:nvSpPr>
+          <p:cNvPr id="3" name="Content Placeholder 2">
+            <a:extLst>
+              <a:ext uri="{FF2B5EF4-FFF2-40B4-BE49-F238E27FC236}">
+                <a16:creationId xmlns:a16="http://schemas.microsoft.com/office/drawing/2014/main" id="{D0372C99-E674-8EE2-B417-2A65DAEBB0BF}"/>
+              </a:ext>
+            </a:extLst>
+          </p:cNvPr>
+          <p:cNvSpPr>
+            <a:spLocks noGrp="1"/>
+          </p:cNvSpPr>
+          <p:nvPr>
+            <p:ph idx="1"/>
+          </p:nvPr>
+        </p:nvSpPr>
+        <p:spPr>
+          <a:xfrm>
+            <a:off x="0" y="2016732"/>
+            <a:ext cx="4420192" cy="4257944"/>
+          </a:xfrm>
+        </p:spPr>
+        <p:txBody>
+          <a:bodyPr>
+            <a:normAutofit/>
+          </a:bodyPr>
+          <a:lstStyle/>
+          <a:p>
+            <a:pPr lvl="1"/>
+            <a:r>
+              <a:rPr lang="en-GB" sz="1800" dirty="0"/>
+              <a:t>Statistical model defines rules of </a:t>
+            </a:r>
+            <a:r>
+              <a:rPr lang="en-GB" sz="1800" dirty="0" err="1"/>
+              <a:t>behavior</a:t>
+            </a:r>
+            <a:r>
+              <a:rPr lang="en-GB" sz="1800" dirty="0"/>
+              <a:t>. We use ABM to reproduce individual life histories over time, letting agents shift status according to the fitted parameters (Carrasco, Mak, and </a:t>
+            </a:r>
+            <a:r>
+              <a:rPr lang="en-GB" sz="1800" dirty="0" err="1"/>
+              <a:t>Hinsch</a:t>
+            </a:r>
+            <a:r>
+              <a:rPr lang="en-GB" sz="1800" dirty="0"/>
+              <a:t>, 2023).</a:t>
+            </a:r>
+            <a:endParaRPr lang="en-US" sz="1800" dirty="0"/>
+          </a:p>
+          <a:p>
+            <a:pPr lvl="1"/>
+            <a:endParaRPr lang="en-US" sz="1800" dirty="0"/>
+          </a:p>
+          <a:p>
+            <a:pPr lvl="1"/>
+            <a:r>
+              <a:rPr lang="en-US" sz="1800" dirty="0"/>
+              <a:t>Why would we be interested?</a:t>
+            </a:r>
+          </a:p>
+          <a:p>
+            <a:pPr lvl="2"/>
+            <a:r>
+              <a:rPr lang="en-US" sz="1600" dirty="0"/>
+              <a:t>Alternative scenarios: different effect of parameters.</a:t>
+            </a:r>
+          </a:p>
+          <a:p>
+            <a:pPr lvl="2"/>
+            <a:r>
+              <a:rPr lang="en-US" sz="1600" dirty="0"/>
+              <a:t>Add theoretical features, explicit modelling of agents’ properties.</a:t>
+            </a:r>
+          </a:p>
+          <a:p>
+            <a:pPr lvl="2"/>
+            <a:r>
+              <a:rPr lang="en-US" sz="1600" dirty="0"/>
+              <a:t>Forecasting based on dynamics given by previous behavior. </a:t>
+            </a:r>
+          </a:p>
+        </p:txBody>
+      </p:sp>
+      <p:pic>
+        <p:nvPicPr>
+          <p:cNvPr id="4" name="Content Placeholder 4" descr="A picture containing text, diagram, line, plot&#10;&#10;Description automatically generated">
+            <a:extLst>
+              <a:ext uri="{FF2B5EF4-FFF2-40B4-BE49-F238E27FC236}">
+                <a16:creationId xmlns:a16="http://schemas.microsoft.com/office/drawing/2014/main" id="{F951678A-6877-2243-177A-26640BF7F306}"/>
+              </a:ext>
+            </a:extLst>
+          </p:cNvPr>
+          <p:cNvPicPr>
+            <a:picLocks noChangeAspect="1"/>
+          </p:cNvPicPr>
+          <p:nvPr/>
+        </p:nvPicPr>
+        <p:blipFill>
+          <a:blip r:embed="rId2">
+            <a:extLst>
+              <a:ext uri="{28A0092B-C50C-407E-A947-70E740481C1C}">
+                <a14:useLocalDpi xmlns:a14="http://schemas.microsoft.com/office/drawing/2010/main" val="0"/>
+              </a:ext>
+            </a:extLst>
+          </a:blip>
+          <a:stretch>
+            <a:fillRect/>
+          </a:stretch>
+        </p:blipFill>
+        <p:spPr>
+          <a:xfrm>
+            <a:off x="4640909" y="2132347"/>
+            <a:ext cx="7551091" cy="3624626"/>
+          </a:xfrm>
+          <a:prstGeom prst="rect">
+            <a:avLst/>
+          </a:prstGeom>
+        </p:spPr>
+      </p:pic>
+    </p:spTree>
+    <p:extLst>
+      <p:ext uri="{BB962C8B-B14F-4D97-AF65-F5344CB8AC3E}">
+        <p14:creationId xmlns:p14="http://schemas.microsoft.com/office/powerpoint/2010/main" val="3978684300"/>
+      </p:ext>
+    </p:extLst>
+  </p:cSld>
+  <p:clrMapOvr>
+    <a:masterClrMapping/>
+  </p:clrMapOvr>
+</p:sld>
+</file>
+
 <file path=ppt/slides/slide9.xml><?xml version="1.0" encoding="utf-8"?>
 <p:sld xmlns:a="http://schemas.openxmlformats.org/drawingml/2006/main" xmlns:r="http://schemas.openxmlformats.org/officeDocument/2006/relationships" xmlns:p="http://schemas.openxmlformats.org/presentationml/2006/main">
   <p:cSld>
@@ -9874,7 +9647,7 @@
           <p:cNvPr id="2" name="Title 1">
             <a:extLst>
               <a:ext uri="{FF2B5EF4-FFF2-40B4-BE49-F238E27FC236}">
-                <a16:creationId xmlns:a16="http://schemas.microsoft.com/office/drawing/2014/main" id="{62590990-B00B-01E7-5C74-E48B7D520D2D}"/>
+                <a16:creationId xmlns:a16="http://schemas.microsoft.com/office/drawing/2014/main" id="{0677AF2A-1E92-4745-8A44-907398137C2A}"/>
               </a:ext>
             </a:extLst>
           </p:cNvPr>
@@ -9883,125 +9656,306 @@
           </p:cNvSpPr>
           <p:nvPr>
             <p:ph type="title"/>
+          </p:nvPr>
+        </p:nvSpPr>
+        <p:spPr/>
+        <p:txBody>
+          <a:bodyPr>
+            <a:normAutofit/>
+          </a:bodyPr>
+          <a:lstStyle/>
+          <a:p>
+            <a:r>
+              <a:rPr dirty="0">
+                <a:solidFill>
+                  <a:schemeClr val="accent1"/>
+                </a:solidFill>
+              </a:rPr>
+              <a:t>“</a:t>
+            </a:r>
+            <a:r>
+              <a:rPr lang="es-ES" dirty="0" err="1">
+                <a:solidFill>
+                  <a:schemeClr val="accent1"/>
+                </a:solidFill>
+              </a:rPr>
+              <a:t>Implementing</a:t>
+            </a:r>
+            <a:r>
+              <a:rPr lang="es-ES" dirty="0">
+                <a:solidFill>
+                  <a:schemeClr val="accent1"/>
+                </a:solidFill>
+              </a:rPr>
+              <a:t> </a:t>
+            </a:r>
+            <a:r>
+              <a:rPr lang="en-US" dirty="0">
+                <a:solidFill>
+                  <a:schemeClr val="accent1"/>
+                </a:solidFill>
+              </a:rPr>
+              <a:t>Agent Based Modelling (ABM) informed by survey data in three steps</a:t>
+            </a:r>
+            <a:r>
+              <a:rPr dirty="0">
+                <a:solidFill>
+                  <a:schemeClr val="accent1"/>
+                </a:solidFill>
+              </a:rPr>
+              <a:t>”</a:t>
+            </a:r>
+          </a:p>
+        </p:txBody>
+      </p:sp>
+      <p:sp>
+        <p:nvSpPr>
+          <p:cNvPr id="3" name="Content Placeholder 2">
+            <a:extLst>
+              <a:ext uri="{FF2B5EF4-FFF2-40B4-BE49-F238E27FC236}">
+                <a16:creationId xmlns:a16="http://schemas.microsoft.com/office/drawing/2014/main" id="{D4DDFDCB-211D-40E7-949E-90959D7FA47B}"/>
+              </a:ext>
+            </a:extLst>
+          </p:cNvPr>
+          <p:cNvSpPr>
+            <a:spLocks noGrp="1"/>
+          </p:cNvSpPr>
+          <p:nvPr>
+            <p:ph idx="1"/>
           </p:nvPr>
         </p:nvSpPr>
         <p:spPr>
           <a:xfrm>
-            <a:off x="838200" y="528754"/>
-            <a:ext cx="10515600" cy="1325563"/>
+            <a:off x="165539" y="2065392"/>
+            <a:ext cx="10996448" cy="4290958"/>
           </a:xfrm>
         </p:spPr>
         <p:txBody>
+          <a:bodyPr>
+            <a:normAutofit/>
+          </a:bodyPr>
+          <a:lstStyle/>
+          <a:p>
+            <a:pPr marL="914400" lvl="1" indent="-457200">
+              <a:buFont typeface="+mj-lt"/>
+              <a:buAutoNum type="arabicPeriod"/>
+            </a:pPr>
+            <a:r>
+              <a:rPr lang="es-ES" dirty="0" err="1"/>
+              <a:t>Estimate</a:t>
+            </a:r>
+            <a:r>
+              <a:rPr lang="es-ES" dirty="0"/>
+              <a:t> individual </a:t>
+            </a:r>
+            <a:r>
+              <a:rPr lang="es-ES" dirty="0" err="1"/>
+              <a:t>probabilities</a:t>
+            </a:r>
+            <a:r>
+              <a:rPr lang="es-ES" dirty="0"/>
+              <a:t> </a:t>
+            </a:r>
+            <a:r>
+              <a:rPr lang="es-ES" dirty="0" err="1"/>
+              <a:t>of</a:t>
+            </a:r>
+            <a:r>
+              <a:rPr lang="es-ES" dirty="0"/>
+              <a:t> </a:t>
+            </a:r>
+            <a:r>
+              <a:rPr lang="es-ES" dirty="0" err="1"/>
+              <a:t>first</a:t>
+            </a:r>
+            <a:r>
+              <a:rPr lang="es-ES" dirty="0"/>
+              <a:t> </a:t>
+            </a:r>
+            <a:r>
+              <a:rPr lang="es-ES" dirty="0" err="1"/>
+              <a:t>international</a:t>
+            </a:r>
+            <a:r>
+              <a:rPr lang="es-ES" dirty="0"/>
+              <a:t> </a:t>
+            </a:r>
+            <a:r>
+              <a:rPr lang="es-ES" dirty="0" err="1"/>
+              <a:t>trip</a:t>
+            </a:r>
+            <a:r>
+              <a:rPr lang="es-ES" dirty="0"/>
+              <a:t> to </a:t>
+            </a:r>
+            <a:r>
+              <a:rPr lang="es-ES" dirty="0" err="1"/>
+              <a:t>destinations</a:t>
+            </a:r>
+            <a:r>
+              <a:rPr lang="es-ES" dirty="0"/>
+              <a:t> </a:t>
+            </a:r>
+            <a:r>
+              <a:rPr lang="es-ES" dirty="0" err="1"/>
+              <a:t>of</a:t>
+            </a:r>
+            <a:r>
+              <a:rPr lang="es-ES" dirty="0"/>
+              <a:t> </a:t>
+            </a:r>
+            <a:r>
+              <a:rPr lang="es-ES" dirty="0" err="1"/>
+              <a:t>interest</a:t>
+            </a:r>
+            <a:r>
+              <a:rPr lang="es-ES" dirty="0"/>
+              <a:t> </a:t>
+            </a:r>
+            <a:r>
+              <a:rPr lang="es-ES" dirty="0" err="1"/>
+              <a:t>using</a:t>
+            </a:r>
+            <a:r>
+              <a:rPr lang="es-ES" dirty="0"/>
+              <a:t> </a:t>
+            </a:r>
+            <a:r>
+              <a:rPr lang="es-ES" dirty="0" err="1"/>
+              <a:t>stats</a:t>
+            </a:r>
+            <a:r>
+              <a:rPr lang="es-ES" dirty="0"/>
+              <a:t> </a:t>
+            </a:r>
+            <a:r>
+              <a:rPr lang="es-ES" dirty="0" err="1"/>
+              <a:t>model</a:t>
+            </a:r>
+            <a:r>
+              <a:rPr lang="es-ES" dirty="0"/>
+              <a:t> </a:t>
+            </a:r>
+            <a:r>
+              <a:rPr lang="es-ES" dirty="0" err="1"/>
+              <a:t>of</a:t>
+            </a:r>
+            <a:r>
+              <a:rPr lang="es-ES" dirty="0"/>
+              <a:t> </a:t>
+            </a:r>
+            <a:r>
+              <a:rPr lang="es-ES" dirty="0" err="1"/>
+              <a:t>interest</a:t>
+            </a:r>
+            <a:r>
+              <a:rPr lang="es-ES" dirty="0"/>
+              <a:t>.</a:t>
+            </a:r>
+          </a:p>
+          <a:p>
+            <a:pPr marL="914400" lvl="1" indent="-457200">
+              <a:buFont typeface="+mj-lt"/>
+              <a:buAutoNum type="arabicPeriod"/>
+            </a:pPr>
+            <a:r>
+              <a:rPr lang="en-US" dirty="0"/>
+              <a:t>Reproduce individual life histories over time, letting individuals migrate according to the fitted parameters.</a:t>
+            </a:r>
+          </a:p>
+          <a:p>
+            <a:pPr lvl="2"/>
+            <a:r>
+              <a:rPr lang="en-US" dirty="0"/>
+              <a:t>Agent Based Modelling </a:t>
+            </a:r>
+            <a:r>
+              <a:rPr lang="en-US" b="1" dirty="0"/>
+              <a:t>(ABM).</a:t>
+            </a:r>
+            <a:endParaRPr lang="en-US" dirty="0"/>
+          </a:p>
+          <a:p>
+            <a:pPr lvl="2"/>
+            <a:r>
+              <a:rPr lang="en-US" dirty="0"/>
+              <a:t>Decision function is based on estimated coefficients.</a:t>
+            </a:r>
+          </a:p>
+          <a:p>
+            <a:pPr marL="914400" lvl="1" indent="-457200">
+              <a:buFont typeface="+mj-lt"/>
+              <a:buAutoNum type="arabicPeriod"/>
+            </a:pPr>
+            <a:r>
+              <a:rPr lang="es-ES" dirty="0" err="1"/>
+              <a:t>Simulate</a:t>
+            </a:r>
+            <a:r>
+              <a:rPr lang="es-ES" dirty="0"/>
+              <a:t> s</a:t>
+            </a:r>
+            <a:r>
+              <a:rPr dirty="0" err="1"/>
+              <a:t>cenarios</a:t>
+            </a:r>
+            <a:r>
+              <a:rPr dirty="0"/>
+              <a:t> o</a:t>
+            </a:r>
+            <a:r>
+              <a:rPr lang="es-ES" dirty="0"/>
+              <a:t>r</a:t>
+            </a:r>
+            <a:r>
+              <a:rPr dirty="0"/>
+              <a:t> </a:t>
+            </a:r>
+            <a:r>
+              <a:rPr b="1" dirty="0"/>
+              <a:t>what if hypothetical cases </a:t>
+            </a:r>
+            <a:r>
+              <a:rPr dirty="0"/>
+              <a:t>where networks effects are modified.</a:t>
+            </a:r>
+            <a:endParaRPr lang="es-ES" dirty="0"/>
+          </a:p>
+        </p:txBody>
+      </p:sp>
+      <p:sp>
+        <p:nvSpPr>
+          <p:cNvPr id="4" name="Slide Number Placeholder 3">
+            <a:extLst>
+              <a:ext uri="{FF2B5EF4-FFF2-40B4-BE49-F238E27FC236}">
+                <a16:creationId xmlns:a16="http://schemas.microsoft.com/office/drawing/2014/main" id="{4FA20C88-FA29-FFFE-DA34-B2E9497B8C57}"/>
+              </a:ext>
+            </a:extLst>
+          </p:cNvPr>
+          <p:cNvSpPr>
+            <a:spLocks noGrp="1"/>
+          </p:cNvSpPr>
+          <p:nvPr>
+            <p:ph type="sldNum" sz="quarter" idx="12"/>
+          </p:nvPr>
+        </p:nvSpPr>
+        <p:spPr/>
+        <p:txBody>
           <a:bodyPr/>
           <a:lstStyle/>
           <a:p>
-            <a:r>
-              <a:rPr lang="en-US" dirty="0"/>
-              <a:t>Theoretical ABM: let’s have a look to the Julia code.</a:t>
-            </a:r>
-          </a:p>
-        </p:txBody>
-      </p:sp>
-      <p:sp>
-        <p:nvSpPr>
-          <p:cNvPr id="3" name="TextBox 2">
-            <a:extLst>
-              <a:ext uri="{FF2B5EF4-FFF2-40B4-BE49-F238E27FC236}">
-                <a16:creationId xmlns:a16="http://schemas.microsoft.com/office/drawing/2014/main" id="{063EC124-CC29-A703-61C4-E106137D4AA4}"/>
-              </a:ext>
-            </a:extLst>
-          </p:cNvPr>
-          <p:cNvSpPr txBox="1"/>
-          <p:nvPr/>
-        </p:nvSpPr>
-        <p:spPr>
-          <a:xfrm>
-            <a:off x="838199" y="2232264"/>
-            <a:ext cx="8315425" cy="1846659"/>
-          </a:xfrm>
-          <a:prstGeom prst="rect">
-            <a:avLst/>
-          </a:prstGeom>
-          <a:noFill/>
-        </p:spPr>
-        <p:txBody>
-          <a:bodyPr wrap="square">
-            <a:spAutoFit/>
-          </a:bodyPr>
-          <a:lstStyle/>
-          <a:p>
-            <a:pPr marL="285750" indent="-285750">
-              <a:buFontTx/>
-              <a:buChar char="-"/>
-            </a:pPr>
-            <a:r>
-              <a:rPr lang="en-GB" sz="1600" dirty="0"/>
-              <a:t>5 main scripts defining:</a:t>
-            </a:r>
-          </a:p>
-          <a:p>
-            <a:pPr marL="742950" lvl="1" indent="-285750">
-              <a:buFontTx/>
-              <a:buChar char="-"/>
-            </a:pPr>
-            <a:r>
-              <a:rPr lang="en-GB" sz="1600" dirty="0"/>
-              <a:t>Agents</a:t>
-            </a:r>
-          </a:p>
-          <a:p>
-            <a:pPr marL="742950" lvl="1" indent="-285750">
-              <a:buFontTx/>
-              <a:buChar char="-"/>
-            </a:pPr>
-            <a:r>
-              <a:rPr lang="en-GB" sz="1600" dirty="0"/>
-              <a:t>Model</a:t>
-            </a:r>
-          </a:p>
-          <a:p>
-            <a:pPr marL="742950" lvl="1" indent="-285750">
-              <a:buFontTx/>
-              <a:buChar char="-"/>
-            </a:pPr>
-            <a:r>
-              <a:rPr lang="en-GB" sz="1600" dirty="0"/>
-              <a:t>Setup</a:t>
-            </a:r>
-          </a:p>
-          <a:p>
-            <a:pPr marL="742950" lvl="1" indent="-285750">
-              <a:buFontTx/>
-              <a:buChar char="-"/>
-            </a:pPr>
-            <a:r>
-              <a:rPr lang="en-GB" sz="1600" dirty="0"/>
-              <a:t>Run</a:t>
-            </a:r>
-          </a:p>
-          <a:p>
-            <a:pPr marL="742950" lvl="1" indent="-285750">
-              <a:buFontTx/>
-              <a:buChar char="-"/>
-            </a:pPr>
-            <a:r>
-              <a:rPr lang="en-GB" sz="1600" dirty="0"/>
-              <a:t>Scenarios</a:t>
-            </a:r>
-          </a:p>
-          <a:p>
-            <a:pPr marL="742950" lvl="1" indent="-285750">
-              <a:buFontTx/>
-              <a:buChar char="-"/>
-            </a:pPr>
-            <a:endParaRPr lang="es-ES" dirty="0"/>
+            <a:fld id="{8C659ED5-29AE-4BD1-8EF3-23727FB2C0DE}" type="slidenum">
+              <a:rPr lang="es-ES" smtClean="0"/>
+              <a:t>9</a:t>
+            </a:fld>
+            <a:endParaRPr lang="es-ES"/>
           </a:p>
         </p:txBody>
       </p:sp>
     </p:spTree>
     <p:extLst>
       <p:ext uri="{BB962C8B-B14F-4D97-AF65-F5344CB8AC3E}">
-        <p14:creationId xmlns:p14="http://schemas.microsoft.com/office/powerpoint/2010/main" val="838203943"/>
+        <p14:creationId xmlns:p14="http://schemas.microsoft.com/office/powerpoint/2010/main" val="2429233212"/>
       </p:ext>
     </p:extLst>
   </p:cSld>
